--- a/public/lessons/year-6-maths/spring/week-17/find-benchmark-percentages/teaching-powerpoint-v1.pptx
+++ b/public/lessons/year-6-maths/spring/week-17/find-benchmark-percentages/teaching-powerpoint-v1.pptx
@@ -2,24 +2,24 @@
 <file path=ppt/presentation.xml><?xml version="1.0" encoding="utf-8"?>
 <p:presentation xmlns:p="http://schemas.openxmlformats.org/presentationml/2006/main">
   <p:sldMasterIdLst>
-    <p:sldMasterId xmlns:r="http://schemas.openxmlformats.org/officeDocument/2006/relationships" id="2147483648" r:id="Ra06ebd62a9b44d43"/>
+    <p:sldMasterId xmlns:r="http://schemas.openxmlformats.org/officeDocument/2006/relationships" id="2147483648" r:id="Rb42569990b4b4d53"/>
   </p:sldMasterIdLst>
   <p:notesMasterIdLst>
-    <p:notesMasterId xmlns:r="http://schemas.openxmlformats.org/officeDocument/2006/relationships" r:id="R0b008e4e627543b0"/>
+    <p:notesMasterId xmlns:r="http://schemas.openxmlformats.org/officeDocument/2006/relationships" r:id="Rd4e962a4212a47c5"/>
   </p:notesMasterIdLst>
   <p:sldIdLst>
-    <p:sldId xmlns:r="http://schemas.openxmlformats.org/officeDocument/2006/relationships" id="256" r:id="R3f4c3ebae09d49db"/>
-    <p:sldId xmlns:r="http://schemas.openxmlformats.org/officeDocument/2006/relationships" id="257" r:id="Ra0b6300ad7484620"/>
-    <p:sldId xmlns:r="http://schemas.openxmlformats.org/officeDocument/2006/relationships" id="258" r:id="Rc968bc25b6264333"/>
-    <p:sldId xmlns:r="http://schemas.openxmlformats.org/officeDocument/2006/relationships" id="259" r:id="R3573523af75940fb"/>
-    <p:sldId xmlns:r="http://schemas.openxmlformats.org/officeDocument/2006/relationships" id="260" r:id="Ra4910224cfd44f8b"/>
-    <p:sldId xmlns:r="http://schemas.openxmlformats.org/officeDocument/2006/relationships" id="261" r:id="R25e9592f884f4bd8"/>
-    <p:sldId xmlns:r="http://schemas.openxmlformats.org/officeDocument/2006/relationships" id="262" r:id="R0658d1dcf564421f"/>
-    <p:sldId xmlns:r="http://schemas.openxmlformats.org/officeDocument/2006/relationships" id="263" r:id="R34ed993b644a4c87"/>
-    <p:sldId xmlns:r="http://schemas.openxmlformats.org/officeDocument/2006/relationships" id="264" r:id="R4810010a219b4cbd"/>
-    <p:sldId xmlns:r="http://schemas.openxmlformats.org/officeDocument/2006/relationships" id="265" r:id="R73f7cc9a0de94a70"/>
-    <p:sldId xmlns:r="http://schemas.openxmlformats.org/officeDocument/2006/relationships" id="266" r:id="Rdabe09734ead4382"/>
-    <p:sldId xmlns:r="http://schemas.openxmlformats.org/officeDocument/2006/relationships" id="267" r:id="Rf9a9c7e680ed4d6a"/>
+    <p:sldId xmlns:r="http://schemas.openxmlformats.org/officeDocument/2006/relationships" id="256" r:id="Rf2f82b4067fb4d06"/>
+    <p:sldId xmlns:r="http://schemas.openxmlformats.org/officeDocument/2006/relationships" id="257" r:id="R4c9c8e8a94db4d94"/>
+    <p:sldId xmlns:r="http://schemas.openxmlformats.org/officeDocument/2006/relationships" id="258" r:id="R3bce835331844e44"/>
+    <p:sldId xmlns:r="http://schemas.openxmlformats.org/officeDocument/2006/relationships" id="259" r:id="R3481f3257f0e4a43"/>
+    <p:sldId xmlns:r="http://schemas.openxmlformats.org/officeDocument/2006/relationships" id="260" r:id="R6642dee11fc84366"/>
+    <p:sldId xmlns:r="http://schemas.openxmlformats.org/officeDocument/2006/relationships" id="261" r:id="R5320427eb4e54e05"/>
+    <p:sldId xmlns:r="http://schemas.openxmlformats.org/officeDocument/2006/relationships" id="262" r:id="R2f4cc3eb10134ab5"/>
+    <p:sldId xmlns:r="http://schemas.openxmlformats.org/officeDocument/2006/relationships" id="263" r:id="R1b534cad0ef54a74"/>
+    <p:sldId xmlns:r="http://schemas.openxmlformats.org/officeDocument/2006/relationships" id="264" r:id="R77f6a24d528947c5"/>
+    <p:sldId xmlns:r="http://schemas.openxmlformats.org/officeDocument/2006/relationships" id="265" r:id="Rfbee1da5963146f6"/>
+    <p:sldId xmlns:r="http://schemas.openxmlformats.org/officeDocument/2006/relationships" id="266" r:id="Reb41880dcb374f4b"/>
+    <p:sldId xmlns:r="http://schemas.openxmlformats.org/officeDocument/2006/relationships" id="267" r:id="R833dccbff68f477f"/>
   </p:sldIdLst>
   <p:sldSz cx="12192000" cy="6858000"/>
   <p:notesSz cx="6858000" cy="9144000"/>
@@ -873,7 +873,7 @@
           <a:lstStyle xmlns:a="http://schemas.openxmlformats.org/drawingml/2006/main"/>
           <a:p xmlns:a="http://schemas.openxmlformats.org/drawingml/2006/main">
             <a:r>
-              <a:t>I do. Reveal the question, setup and each calculation stage one click at a time. Pupils watch before copying. Model answer: 90.</a:t>
+              <a:t>I do. Reveal the question, then reveal each mathematical change one click at a time. Point to the numbers and operation that changed before moving to the next line. Final answer: 90.</a:t>
             </a:r>
           </a:p>
         </p:txBody>
@@ -1291,7 +1291,7 @@
   </p:cSld>
   <p:clrMap bg1="lt1" tx1="dk1" bg2="lt2" tx2="dk2" accent1="accent1" accent2="accent2" accent3="accent3" accent4="accent4" accent5="accent5" accent6="accent6" hlink="hlink" folHlink="folHlink"/>
   <p:sldLayoutIdLst>
-    <p:sldLayoutId xmlns:r="http://schemas.openxmlformats.org/officeDocument/2006/relationships" id="2147483649" r:id="R51587bd88b074578"/>
+    <p:sldLayoutId xmlns:r="http://schemas.openxmlformats.org/officeDocument/2006/relationships" id="2147483649" r:id="R84c1f3da24ad406d"/>
   </p:sldLayoutIdLst>
   <p:txStyles>
     <p:titleStyle>
@@ -1842,7 +1842,7 @@
           <p:cNvPr id="12" name="">
             <a:extLst xmlns:a="http://schemas.openxmlformats.org/drawingml/2006/main">
               <a:ext uri="{FF2B5EF4-FFF2-40B4-BE49-F238E27FC236}">
-                <a16:creationId xmlns:a16="http://schemas.microsoft.com/office/drawing/2014/main" id="{1AB728FC-540C-433F-B6E5-EF27B97E8350}"/>
+                <a16:creationId xmlns:a16="http://schemas.microsoft.com/office/drawing/2014/main" id="{1A863AE4-51FC-4CCC-AD7A-5E1D111352FC}"/>
               </a:ext>
             </a:extLst>
           </p:cNvPr>
@@ -1874,7 +1874,7 @@
           <p:cNvPr id="2" name="">
             <a:extLst xmlns:a="http://schemas.openxmlformats.org/drawingml/2006/main">
               <a:ext uri="{FF2B5EF4-FFF2-40B4-BE49-F238E27FC236}">
-                <a16:creationId xmlns:a16="http://schemas.microsoft.com/office/drawing/2014/main" id="{931A949F-A705-4AE2-9E29-60626189655C}"/>
+                <a16:creationId xmlns:a16="http://schemas.microsoft.com/office/drawing/2014/main" id="{CAF17576-B2C6-43D1-8BD8-2756E3063A32}"/>
               </a:ext>
             </a:extLst>
           </p:cNvPr>
@@ -1931,7 +1931,7 @@
           <p:cNvPr id="3" name="">
             <a:extLst xmlns:a="http://schemas.openxmlformats.org/drawingml/2006/main">
               <a:ext uri="{FF2B5EF4-FFF2-40B4-BE49-F238E27FC236}">
-                <a16:creationId xmlns:a16="http://schemas.microsoft.com/office/drawing/2014/main" id="{967E93D9-4B49-4062-8A35-52BB49E72C1A}"/>
+                <a16:creationId xmlns:a16="http://schemas.microsoft.com/office/drawing/2014/main" id="{43E58A36-647B-48E9-9541-ECD42729D452}"/>
               </a:ext>
             </a:extLst>
           </p:cNvPr>
@@ -1965,7 +1965,7 @@
           <p:cNvPr id="4" name="">
             <a:extLst xmlns:a="http://schemas.openxmlformats.org/drawingml/2006/main">
               <a:ext uri="{FF2B5EF4-FFF2-40B4-BE49-F238E27FC236}">
-                <a16:creationId xmlns:a16="http://schemas.microsoft.com/office/drawing/2014/main" id="{A99230AE-C1D6-4615-9FE0-C9689456B5D0}"/>
+                <a16:creationId xmlns:a16="http://schemas.microsoft.com/office/drawing/2014/main" id="{72129511-2002-46E5-8476-A74C00E7BFA4}"/>
               </a:ext>
             </a:extLst>
           </p:cNvPr>
@@ -2022,7 +2022,7 @@
           <p:cNvPr id="5" name="">
             <a:extLst xmlns:a="http://schemas.openxmlformats.org/drawingml/2006/main">
               <a:ext uri="{FF2B5EF4-FFF2-40B4-BE49-F238E27FC236}">
-                <a16:creationId xmlns:a16="http://schemas.microsoft.com/office/drawing/2014/main" id="{F4644322-341A-49CE-80AF-ED84BECD92CE}"/>
+                <a16:creationId xmlns:a16="http://schemas.microsoft.com/office/drawing/2014/main" id="{23E32D24-8C4E-45AF-9CDA-DDDDBCE6640D}"/>
               </a:ext>
             </a:extLst>
           </p:cNvPr>
@@ -2079,7 +2079,7 @@
           <p:cNvPr id="6" name="">
             <a:extLst xmlns:a="http://schemas.openxmlformats.org/drawingml/2006/main">
               <a:ext uri="{FF2B5EF4-FFF2-40B4-BE49-F238E27FC236}">
-                <a16:creationId xmlns:a16="http://schemas.microsoft.com/office/drawing/2014/main" id="{5B059B5F-D7FE-48A2-9842-52FC354FBEAA}"/>
+                <a16:creationId xmlns:a16="http://schemas.microsoft.com/office/drawing/2014/main" id="{B6262CCE-A4B2-4D88-82B3-DD588E439355}"/>
               </a:ext>
             </a:extLst>
           </p:cNvPr>
@@ -2113,7 +2113,7 @@
           <p:cNvPr id="7" name="">
             <a:extLst xmlns:a="http://schemas.openxmlformats.org/drawingml/2006/main">
               <a:ext uri="{FF2B5EF4-FFF2-40B4-BE49-F238E27FC236}">
-                <a16:creationId xmlns:a16="http://schemas.microsoft.com/office/drawing/2014/main" id="{FEA820CC-678E-40E7-9941-F81747E1CD18}"/>
+                <a16:creationId xmlns:a16="http://schemas.microsoft.com/office/drawing/2014/main" id="{3361F77C-B499-4CE0-ACE9-51C7BD96DC8B}"/>
               </a:ext>
             </a:extLst>
           </p:cNvPr>
@@ -2170,7 +2170,7 @@
           <p:cNvPr id="8" name="">
             <a:extLst xmlns:a="http://schemas.openxmlformats.org/drawingml/2006/main">
               <a:ext uri="{FF2B5EF4-FFF2-40B4-BE49-F238E27FC236}">
-                <a16:creationId xmlns:a16="http://schemas.microsoft.com/office/drawing/2014/main" id="{67E2189A-1DA0-464E-A26C-42BC57101AF7}"/>
+                <a16:creationId xmlns:a16="http://schemas.microsoft.com/office/drawing/2014/main" id="{87310CF4-13DF-4FA8-9A83-EE9B9E44589D}"/>
               </a:ext>
             </a:extLst>
           </p:cNvPr>
@@ -2227,7 +2227,7 @@
           <p:cNvPr id="9" name="">
             <a:extLst xmlns:a="http://schemas.openxmlformats.org/drawingml/2006/main">
               <a:ext uri="{FF2B5EF4-FFF2-40B4-BE49-F238E27FC236}">
-                <a16:creationId xmlns:a16="http://schemas.microsoft.com/office/drawing/2014/main" id="{7D7DE073-5F85-4C5F-8EE1-328ACD86B3F4}"/>
+                <a16:creationId xmlns:a16="http://schemas.microsoft.com/office/drawing/2014/main" id="{B800875B-9676-48D3-9D1B-F8E07EA8F5D7}"/>
               </a:ext>
             </a:extLst>
           </p:cNvPr>
@@ -2284,7 +2284,7 @@
           <p:cNvPr id="10" name="">
             <a:extLst xmlns:a="http://schemas.openxmlformats.org/drawingml/2006/main">
               <a:ext uri="{FF2B5EF4-FFF2-40B4-BE49-F238E27FC236}">
-                <a16:creationId xmlns:a16="http://schemas.microsoft.com/office/drawing/2014/main" id="{DBA42A0E-252E-4D73-9ED1-650C64BBCBE8}"/>
+                <a16:creationId xmlns:a16="http://schemas.microsoft.com/office/drawing/2014/main" id="{8BC5201E-C71F-4B5A-ABB0-71218D25BB51}"/>
               </a:ext>
             </a:extLst>
           </p:cNvPr>
@@ -2341,7 +2341,7 @@
           <p:cNvPr id="11" name="">
             <a:extLst xmlns:a="http://schemas.openxmlformats.org/drawingml/2006/main">
               <a:ext uri="{FF2B5EF4-FFF2-40B4-BE49-F238E27FC236}">
-                <a16:creationId xmlns:a16="http://schemas.microsoft.com/office/drawing/2014/main" id="{0AFDD6B4-9E82-4A93-B7D1-693369AA72B9}"/>
+                <a16:creationId xmlns:a16="http://schemas.microsoft.com/office/drawing/2014/main" id="{66E50F6F-8D2C-4410-B527-C20AB350E5E6}"/>
               </a:ext>
             </a:extLst>
           </p:cNvPr>
@@ -2396,7 +2396,7 @@
     </p:spTree>
     <p:extLst>
       <p:ext uri="{BB962C8B-B14F-4D97-AF65-F5344CB8AC3E}">
-        <p14:creationId xmlns:p14="http://schemas.microsoft.com/office/powerpoint/2010/main" val="1241697980"/>
+        <p14:creationId xmlns:p14="http://schemas.microsoft.com/office/powerpoint/2010/main" val="1458407005"/>
       </p:ext>
     </p:extLst>
   </p:cSld>
@@ -2427,7 +2427,7 @@
           <p:cNvPr id="14" name="">
             <a:extLst xmlns:a="http://schemas.openxmlformats.org/drawingml/2006/main">
               <a:ext uri="{FF2B5EF4-FFF2-40B4-BE49-F238E27FC236}">
-                <a16:creationId xmlns:a16="http://schemas.microsoft.com/office/drawing/2014/main" id="{987FC92E-DD06-4D8C-8DDD-63DD89567782}"/>
+                <a16:creationId xmlns:a16="http://schemas.microsoft.com/office/drawing/2014/main" id="{C808F7BC-1AB1-4518-B067-2D14E4196CF0}"/>
               </a:ext>
             </a:extLst>
           </p:cNvPr>
@@ -2459,7 +2459,7 @@
           <p:cNvPr id="2" name="">
             <a:extLst xmlns:a="http://schemas.openxmlformats.org/drawingml/2006/main">
               <a:ext uri="{FF2B5EF4-FFF2-40B4-BE49-F238E27FC236}">
-                <a16:creationId xmlns:a16="http://schemas.microsoft.com/office/drawing/2014/main" id="{D0D6B9EB-9FB3-45A4-B6BD-ADC8256825D6}"/>
+                <a16:creationId xmlns:a16="http://schemas.microsoft.com/office/drawing/2014/main" id="{F4ECD34C-74E3-4A3C-B6CC-EE13389EE70B}"/>
               </a:ext>
             </a:extLst>
           </p:cNvPr>
@@ -2516,7 +2516,7 @@
           <p:cNvPr id="3" name="">
             <a:extLst xmlns:a="http://schemas.openxmlformats.org/drawingml/2006/main">
               <a:ext uri="{FF2B5EF4-FFF2-40B4-BE49-F238E27FC236}">
-                <a16:creationId xmlns:a16="http://schemas.microsoft.com/office/drawing/2014/main" id="{8D5D3BE3-A556-4F9F-97E6-8EF61208AD9C}"/>
+                <a16:creationId xmlns:a16="http://schemas.microsoft.com/office/drawing/2014/main" id="{7BC1A8E5-2B1F-42AC-B66D-AA987B05F810}"/>
               </a:ext>
             </a:extLst>
           </p:cNvPr>
@@ -2548,7 +2548,7 @@
           <p:cNvPr id="4" name="">
             <a:extLst xmlns:a="http://schemas.openxmlformats.org/drawingml/2006/main">
               <a:ext uri="{FF2B5EF4-FFF2-40B4-BE49-F238E27FC236}">
-                <a16:creationId xmlns:a16="http://schemas.microsoft.com/office/drawing/2014/main" id="{9B67258B-0FCC-4AF5-A19B-D5AF3DF7C63F}"/>
+                <a16:creationId xmlns:a16="http://schemas.microsoft.com/office/drawing/2014/main" id="{E9437F05-379B-49C0-80BF-BED5957E15F8}"/>
               </a:ext>
             </a:extLst>
           </p:cNvPr>
@@ -2605,7 +2605,7 @@
           <p:cNvPr id="5" name="">
             <a:extLst xmlns:a="http://schemas.openxmlformats.org/drawingml/2006/main">
               <a:ext uri="{FF2B5EF4-FFF2-40B4-BE49-F238E27FC236}">
-                <a16:creationId xmlns:a16="http://schemas.microsoft.com/office/drawing/2014/main" id="{86063FA5-1068-4C17-9198-8BB70608A4AE}"/>
+                <a16:creationId xmlns:a16="http://schemas.microsoft.com/office/drawing/2014/main" id="{FCD8AF57-B392-48A4-AA52-06F8FA3A1AFC}"/>
               </a:ext>
             </a:extLst>
           </p:cNvPr>
@@ -2662,7 +2662,7 @@
           <p:cNvPr id="6" name="">
             <a:extLst xmlns:a="http://schemas.openxmlformats.org/drawingml/2006/main">
               <a:ext uri="{FF2B5EF4-FFF2-40B4-BE49-F238E27FC236}">
-                <a16:creationId xmlns:a16="http://schemas.microsoft.com/office/drawing/2014/main" id="{192ACDF4-436F-47F6-BC29-3258641781FB}"/>
+                <a16:creationId xmlns:a16="http://schemas.microsoft.com/office/drawing/2014/main" id="{DD917E06-983F-4DF9-90BC-6191FFC7D2EF}"/>
               </a:ext>
             </a:extLst>
           </p:cNvPr>
@@ -2719,7 +2719,7 @@
           <p:cNvPr id="7" name="">
             <a:extLst xmlns:a="http://schemas.openxmlformats.org/drawingml/2006/main">
               <a:ext uri="{FF2B5EF4-FFF2-40B4-BE49-F238E27FC236}">
-                <a16:creationId xmlns:a16="http://schemas.microsoft.com/office/drawing/2014/main" id="{D36663FC-2FCA-4303-A044-B96F696D99A7}"/>
+                <a16:creationId xmlns:a16="http://schemas.microsoft.com/office/drawing/2014/main" id="{C52F6BCA-945E-4C96-A22A-235E47924982}"/>
               </a:ext>
             </a:extLst>
           </p:cNvPr>
@@ -2751,7 +2751,7 @@
           <p:cNvPr id="8" name="">
             <a:extLst xmlns:a="http://schemas.openxmlformats.org/drawingml/2006/main">
               <a:ext uri="{FF2B5EF4-FFF2-40B4-BE49-F238E27FC236}">
-                <a16:creationId xmlns:a16="http://schemas.microsoft.com/office/drawing/2014/main" id="{DA1FD982-5315-42F8-B391-A72DF1E8D756}"/>
+                <a16:creationId xmlns:a16="http://schemas.microsoft.com/office/drawing/2014/main" id="{61D7032E-A0A1-4DC4-BA6D-D1D2784DA251}"/>
               </a:ext>
             </a:extLst>
           </p:cNvPr>
@@ -2808,7 +2808,7 @@
           <p:cNvPr id="9" name="">
             <a:extLst xmlns:a="http://schemas.openxmlformats.org/drawingml/2006/main">
               <a:ext uri="{FF2B5EF4-FFF2-40B4-BE49-F238E27FC236}">
-                <a16:creationId xmlns:a16="http://schemas.microsoft.com/office/drawing/2014/main" id="{715AE2D7-760C-4688-931C-70FB0987709E}"/>
+                <a16:creationId xmlns:a16="http://schemas.microsoft.com/office/drawing/2014/main" id="{63184D8B-4BB6-4157-BE21-3756DEFD6D84}"/>
               </a:ext>
             </a:extLst>
           </p:cNvPr>
@@ -2865,7 +2865,7 @@
           <p:cNvPr id="10" name="">
             <a:extLst xmlns:a="http://schemas.openxmlformats.org/drawingml/2006/main">
               <a:ext uri="{FF2B5EF4-FFF2-40B4-BE49-F238E27FC236}">
-                <a16:creationId xmlns:a16="http://schemas.microsoft.com/office/drawing/2014/main" id="{6D1F2361-4407-493B-9BE0-1CE95C061D8B}"/>
+                <a16:creationId xmlns:a16="http://schemas.microsoft.com/office/drawing/2014/main" id="{FDA049F6-03C4-4712-B114-E1F36F2222A3}"/>
               </a:ext>
             </a:extLst>
           </p:cNvPr>
@@ -2922,7 +2922,7 @@
           <p:cNvPr id="11" name="">
             <a:extLst xmlns:a="http://schemas.openxmlformats.org/drawingml/2006/main">
               <a:ext uri="{FF2B5EF4-FFF2-40B4-BE49-F238E27FC236}">
-                <a16:creationId xmlns:a16="http://schemas.microsoft.com/office/drawing/2014/main" id="{2F3BA15E-BFBA-4277-80C4-4FC138702DB3}"/>
+                <a16:creationId xmlns:a16="http://schemas.microsoft.com/office/drawing/2014/main" id="{B33CDFDE-2D24-47A3-8B45-DF14D75A1BE9}"/>
               </a:ext>
             </a:extLst>
           </p:cNvPr>
@@ -2979,7 +2979,7 @@
           <p:cNvPr id="12" name="">
             <a:extLst xmlns:a="http://schemas.openxmlformats.org/drawingml/2006/main">
               <a:ext uri="{FF2B5EF4-FFF2-40B4-BE49-F238E27FC236}">
-                <a16:creationId xmlns:a16="http://schemas.microsoft.com/office/drawing/2014/main" id="{4A787C73-C302-4734-A301-35E4294FC252}"/>
+                <a16:creationId xmlns:a16="http://schemas.microsoft.com/office/drawing/2014/main" id="{CE1143D3-3E27-407B-870A-61451DF3B5E8}"/>
               </a:ext>
             </a:extLst>
           </p:cNvPr>
@@ -3036,7 +3036,7 @@
           <p:cNvPr id="13" name="">
             <a:extLst xmlns:a="http://schemas.openxmlformats.org/drawingml/2006/main">
               <a:ext uri="{FF2B5EF4-FFF2-40B4-BE49-F238E27FC236}">
-                <a16:creationId xmlns:a16="http://schemas.microsoft.com/office/drawing/2014/main" id="{61B10359-6D0D-4000-B7C9-0840B972A962}"/>
+                <a16:creationId xmlns:a16="http://schemas.microsoft.com/office/drawing/2014/main" id="{369045F0-F14A-4241-B249-00093B6363A2}"/>
               </a:ext>
             </a:extLst>
           </p:cNvPr>
@@ -3091,7 +3091,7 @@
     </p:spTree>
     <p:extLst>
       <p:ext uri="{BB962C8B-B14F-4D97-AF65-F5344CB8AC3E}">
-        <p14:creationId xmlns:p14="http://schemas.microsoft.com/office/powerpoint/2010/main" val="1670819667"/>
+        <p14:creationId xmlns:p14="http://schemas.microsoft.com/office/powerpoint/2010/main" val="409326466"/>
       </p:ext>
     </p:extLst>
   </p:cSld>
@@ -3292,7 +3292,7 @@
           <p:cNvPr id="19" name="">
             <a:extLst xmlns:a="http://schemas.openxmlformats.org/drawingml/2006/main">
               <a:ext uri="{FF2B5EF4-FFF2-40B4-BE49-F238E27FC236}">
-                <a16:creationId xmlns:a16="http://schemas.microsoft.com/office/drawing/2014/main" id="{110A90DE-F3DE-4481-9BFE-6650B4159F82}"/>
+                <a16:creationId xmlns:a16="http://schemas.microsoft.com/office/drawing/2014/main" id="{5F18841D-212C-449B-B745-1401D0448646}"/>
               </a:ext>
             </a:extLst>
           </p:cNvPr>
@@ -3324,7 +3324,7 @@
           <p:cNvPr id="2" name="">
             <a:extLst xmlns:a="http://schemas.openxmlformats.org/drawingml/2006/main">
               <a:ext uri="{FF2B5EF4-FFF2-40B4-BE49-F238E27FC236}">
-                <a16:creationId xmlns:a16="http://schemas.microsoft.com/office/drawing/2014/main" id="{A62356C3-F062-4EBB-B314-F816B84D98BA}"/>
+                <a16:creationId xmlns:a16="http://schemas.microsoft.com/office/drawing/2014/main" id="{49D9056A-3E78-4EDD-899D-20582D34DAB2}"/>
               </a:ext>
             </a:extLst>
           </p:cNvPr>
@@ -3381,7 +3381,7 @@
           <p:cNvPr id="3" name="">
             <a:extLst xmlns:a="http://schemas.openxmlformats.org/drawingml/2006/main">
               <a:ext uri="{FF2B5EF4-FFF2-40B4-BE49-F238E27FC236}">
-                <a16:creationId xmlns:a16="http://schemas.microsoft.com/office/drawing/2014/main" id="{D5694791-DB4D-4E40-B992-0CAF64D49532}"/>
+                <a16:creationId xmlns:a16="http://schemas.microsoft.com/office/drawing/2014/main" id="{CF571381-8EFC-45B8-A4F7-904E8444AC9F}"/>
               </a:ext>
             </a:extLst>
           </p:cNvPr>
@@ -3413,7 +3413,7 @@
           <p:cNvPr id="4" name="">
             <a:extLst xmlns:a="http://schemas.openxmlformats.org/drawingml/2006/main">
               <a:ext uri="{FF2B5EF4-FFF2-40B4-BE49-F238E27FC236}">
-                <a16:creationId xmlns:a16="http://schemas.microsoft.com/office/drawing/2014/main" id="{8C5A0D7F-B93D-47E5-82A8-C1DE7D5186BE}"/>
+                <a16:creationId xmlns:a16="http://schemas.microsoft.com/office/drawing/2014/main" id="{43318A17-7BB3-4B59-8629-1CED53026764}"/>
               </a:ext>
             </a:extLst>
           </p:cNvPr>
@@ -3470,7 +3470,7 @@
           <p:cNvPr id="5" name="">
             <a:extLst xmlns:a="http://schemas.openxmlformats.org/drawingml/2006/main">
               <a:ext uri="{FF2B5EF4-FFF2-40B4-BE49-F238E27FC236}">
-                <a16:creationId xmlns:a16="http://schemas.microsoft.com/office/drawing/2014/main" id="{E9178935-F5E1-4197-92B5-0940202964FB}"/>
+                <a16:creationId xmlns:a16="http://schemas.microsoft.com/office/drawing/2014/main" id="{41A61DCE-E9FD-48FF-A21A-B516AF0EC737}"/>
               </a:ext>
             </a:extLst>
           </p:cNvPr>
@@ -3527,7 +3527,7 @@
           <p:cNvPr id="6" name="">
             <a:extLst xmlns:a="http://schemas.openxmlformats.org/drawingml/2006/main">
               <a:ext uri="{FF2B5EF4-FFF2-40B4-BE49-F238E27FC236}">
-                <a16:creationId xmlns:a16="http://schemas.microsoft.com/office/drawing/2014/main" id="{C3FCEED6-6AE1-4F52-A02B-2D67A91EFE21}"/>
+                <a16:creationId xmlns:a16="http://schemas.microsoft.com/office/drawing/2014/main" id="{1D029D39-294E-44AB-9EE7-B2ADDD249EE8}"/>
               </a:ext>
             </a:extLst>
           </p:cNvPr>
@@ -3584,7 +3584,7 @@
           <p:cNvPr id="7" name="">
             <a:extLst xmlns:a="http://schemas.openxmlformats.org/drawingml/2006/main">
               <a:ext uri="{FF2B5EF4-FFF2-40B4-BE49-F238E27FC236}">
-                <a16:creationId xmlns:a16="http://schemas.microsoft.com/office/drawing/2014/main" id="{58766250-CC50-4E6D-B252-2999B37FD545}"/>
+                <a16:creationId xmlns:a16="http://schemas.microsoft.com/office/drawing/2014/main" id="{349705D9-9EDA-45C2-96E7-7A18EF5C569F}"/>
               </a:ext>
             </a:extLst>
           </p:cNvPr>
@@ -3616,7 +3616,7 @@
           <p:cNvPr id="8" name="">
             <a:extLst xmlns:a="http://schemas.openxmlformats.org/drawingml/2006/main">
               <a:ext uri="{FF2B5EF4-FFF2-40B4-BE49-F238E27FC236}">
-                <a16:creationId xmlns:a16="http://schemas.microsoft.com/office/drawing/2014/main" id="{4F02BAEA-55E0-4613-BB5E-FC81085C0CEB}"/>
+                <a16:creationId xmlns:a16="http://schemas.microsoft.com/office/drawing/2014/main" id="{9B4C02F4-49A9-474A-8282-5530B0C3FD84}"/>
               </a:ext>
             </a:extLst>
           </p:cNvPr>
@@ -3673,7 +3673,7 @@
           <p:cNvPr id="9" name="">
             <a:extLst xmlns:a="http://schemas.openxmlformats.org/drawingml/2006/main">
               <a:ext uri="{FF2B5EF4-FFF2-40B4-BE49-F238E27FC236}">
-                <a16:creationId xmlns:a16="http://schemas.microsoft.com/office/drawing/2014/main" id="{CA2AAADE-EDDA-4ECA-8A37-655A6850DCB7}"/>
+                <a16:creationId xmlns:a16="http://schemas.microsoft.com/office/drawing/2014/main" id="{725BC52D-556C-4A02-9603-CB2D3C9400C3}"/>
               </a:ext>
             </a:extLst>
           </p:cNvPr>
@@ -3730,7 +3730,7 @@
           <p:cNvPr id="10" name="">
             <a:extLst xmlns:a="http://schemas.openxmlformats.org/drawingml/2006/main">
               <a:ext uri="{FF2B5EF4-FFF2-40B4-BE49-F238E27FC236}">
-                <a16:creationId xmlns:a16="http://schemas.microsoft.com/office/drawing/2014/main" id="{C054A09A-6C42-4D84-8E5A-F41A3A6A29E0}"/>
+                <a16:creationId xmlns:a16="http://schemas.microsoft.com/office/drawing/2014/main" id="{94984168-9569-407E-88D1-7CCD17E539C8}"/>
               </a:ext>
             </a:extLst>
           </p:cNvPr>
@@ -3787,7 +3787,7 @@
           <p:cNvPr id="11" name="">
             <a:extLst xmlns:a="http://schemas.openxmlformats.org/drawingml/2006/main">
               <a:ext uri="{FF2B5EF4-FFF2-40B4-BE49-F238E27FC236}">
-                <a16:creationId xmlns:a16="http://schemas.microsoft.com/office/drawing/2014/main" id="{1C14EBA3-7AAF-4F9E-AC7B-532BFEA4D8AF}"/>
+                <a16:creationId xmlns:a16="http://schemas.microsoft.com/office/drawing/2014/main" id="{BEC71072-FC5E-43C5-B905-07577F1629DE}"/>
               </a:ext>
             </a:extLst>
           </p:cNvPr>
@@ -3821,7 +3821,7 @@
           <p:cNvPr id="12" name="">
             <a:extLst xmlns:a="http://schemas.openxmlformats.org/drawingml/2006/main">
               <a:ext uri="{FF2B5EF4-FFF2-40B4-BE49-F238E27FC236}">
-                <a16:creationId xmlns:a16="http://schemas.microsoft.com/office/drawing/2014/main" id="{8F3632F4-F35A-49CA-9D87-52CC6B28E438}"/>
+                <a16:creationId xmlns:a16="http://schemas.microsoft.com/office/drawing/2014/main" id="{5ADDF0F0-6108-49E5-A405-7014A25DD1E2}"/>
               </a:ext>
             </a:extLst>
           </p:cNvPr>
@@ -3878,7 +3878,7 @@
           <p:cNvPr id="13" name="">
             <a:extLst xmlns:a="http://schemas.openxmlformats.org/drawingml/2006/main">
               <a:ext uri="{FF2B5EF4-FFF2-40B4-BE49-F238E27FC236}">
-                <a16:creationId xmlns:a16="http://schemas.microsoft.com/office/drawing/2014/main" id="{43B1BFCC-694F-47D7-B122-D14EDD416829}"/>
+                <a16:creationId xmlns:a16="http://schemas.microsoft.com/office/drawing/2014/main" id="{9B23CF88-E233-45C1-8CCC-C8E1BD7755C4}"/>
               </a:ext>
             </a:extLst>
           </p:cNvPr>
@@ -3935,7 +3935,7 @@
           <p:cNvPr id="14" name="">
             <a:extLst xmlns:a="http://schemas.openxmlformats.org/drawingml/2006/main">
               <a:ext uri="{FF2B5EF4-FFF2-40B4-BE49-F238E27FC236}">
-                <a16:creationId xmlns:a16="http://schemas.microsoft.com/office/drawing/2014/main" id="{E8C2C65D-45A0-4C3A-87CE-5F57305E8EB2}"/>
+                <a16:creationId xmlns:a16="http://schemas.microsoft.com/office/drawing/2014/main" id="{9E7517CF-E1EF-4352-9499-622AA302725F}"/>
               </a:ext>
             </a:extLst>
           </p:cNvPr>
@@ -3992,7 +3992,7 @@
           <p:cNvPr id="15" name="">
             <a:extLst xmlns:a="http://schemas.openxmlformats.org/drawingml/2006/main">
               <a:ext uri="{FF2B5EF4-FFF2-40B4-BE49-F238E27FC236}">
-                <a16:creationId xmlns:a16="http://schemas.microsoft.com/office/drawing/2014/main" id="{C65D9A02-73FC-4AC5-8157-FD8EA6F1DFD6}"/>
+                <a16:creationId xmlns:a16="http://schemas.microsoft.com/office/drawing/2014/main" id="{1B5EBC55-3744-4B5E-A809-785F2AD3F4CD}"/>
               </a:ext>
             </a:extLst>
           </p:cNvPr>
@@ -4026,7 +4026,7 @@
           <p:cNvPr id="16" name="">
             <a:extLst xmlns:a="http://schemas.openxmlformats.org/drawingml/2006/main">
               <a:ext uri="{FF2B5EF4-FFF2-40B4-BE49-F238E27FC236}">
-                <a16:creationId xmlns:a16="http://schemas.microsoft.com/office/drawing/2014/main" id="{47DBFE05-7573-4EC7-A9AC-69B5D4D695BE}"/>
+                <a16:creationId xmlns:a16="http://schemas.microsoft.com/office/drawing/2014/main" id="{F7D4001F-AA07-4B6F-A4C2-A825F3229029}"/>
               </a:ext>
             </a:extLst>
           </p:cNvPr>
@@ -4083,7 +4083,7 @@
           <p:cNvPr id="17" name="">
             <a:extLst xmlns:a="http://schemas.openxmlformats.org/drawingml/2006/main">
               <a:ext uri="{FF2B5EF4-FFF2-40B4-BE49-F238E27FC236}">
-                <a16:creationId xmlns:a16="http://schemas.microsoft.com/office/drawing/2014/main" id="{60CF5AD5-1979-4F74-8798-217E764DAAE4}"/>
+                <a16:creationId xmlns:a16="http://schemas.microsoft.com/office/drawing/2014/main" id="{CDB183FE-6F29-490F-938F-6D9A818BBB3C}"/>
               </a:ext>
             </a:extLst>
           </p:cNvPr>
@@ -4140,7 +4140,7 @@
           <p:cNvPr id="18" name="">
             <a:extLst xmlns:a="http://schemas.openxmlformats.org/drawingml/2006/main">
               <a:ext uri="{FF2B5EF4-FFF2-40B4-BE49-F238E27FC236}">
-                <a16:creationId xmlns:a16="http://schemas.microsoft.com/office/drawing/2014/main" id="{1B77A0EC-49E8-42AB-828C-181E832C9D51}"/>
+                <a16:creationId xmlns:a16="http://schemas.microsoft.com/office/drawing/2014/main" id="{7ED27C06-F70A-4823-B775-892EA34FB19B}"/>
               </a:ext>
             </a:extLst>
           </p:cNvPr>
@@ -4195,7 +4195,7 @@
     </p:spTree>
     <p:extLst>
       <p:ext uri="{BB962C8B-B14F-4D97-AF65-F5344CB8AC3E}">
-        <p14:creationId xmlns:p14="http://schemas.microsoft.com/office/powerpoint/2010/main" val="743283244"/>
+        <p14:creationId xmlns:p14="http://schemas.microsoft.com/office/powerpoint/2010/main" val="1696647336"/>
       </p:ext>
     </p:extLst>
   </p:cSld>
@@ -4350,7 +4350,7 @@
           <p:cNvPr id="23" name="">
             <a:extLst xmlns:a="http://schemas.openxmlformats.org/drawingml/2006/main">
               <a:ext uri="{FF2B5EF4-FFF2-40B4-BE49-F238E27FC236}">
-                <a16:creationId xmlns:a16="http://schemas.microsoft.com/office/drawing/2014/main" id="{CED1CACB-982A-483D-8FCF-7576A3B72D07}"/>
+                <a16:creationId xmlns:a16="http://schemas.microsoft.com/office/drawing/2014/main" id="{1F795CFD-DA2D-4C4D-A1B5-E21AF9114B62}"/>
               </a:ext>
             </a:extLst>
           </p:cNvPr>
@@ -4382,7 +4382,7 @@
           <p:cNvPr id="2" name="">
             <a:extLst xmlns:a="http://schemas.openxmlformats.org/drawingml/2006/main">
               <a:ext uri="{FF2B5EF4-FFF2-40B4-BE49-F238E27FC236}">
-                <a16:creationId xmlns:a16="http://schemas.microsoft.com/office/drawing/2014/main" id="{65E6714A-6ADE-4779-B741-B2C088656895}"/>
+                <a16:creationId xmlns:a16="http://schemas.microsoft.com/office/drawing/2014/main" id="{DAF28579-02B7-4241-BE93-AC027758AA2D}"/>
               </a:ext>
             </a:extLst>
           </p:cNvPr>
@@ -4439,7 +4439,7 @@
           <p:cNvPr id="3" name="">
             <a:extLst xmlns:a="http://schemas.openxmlformats.org/drawingml/2006/main">
               <a:ext uri="{FF2B5EF4-FFF2-40B4-BE49-F238E27FC236}">
-                <a16:creationId xmlns:a16="http://schemas.microsoft.com/office/drawing/2014/main" id="{22565871-02F8-47DF-AFE1-A0C0AC8E5452}"/>
+                <a16:creationId xmlns:a16="http://schemas.microsoft.com/office/drawing/2014/main" id="{FBAEAEFF-78BF-4356-8E02-EBE9607315E2}"/>
               </a:ext>
             </a:extLst>
           </p:cNvPr>
@@ -4471,7 +4471,7 @@
           <p:cNvPr id="4" name="">
             <a:extLst xmlns:a="http://schemas.openxmlformats.org/drawingml/2006/main">
               <a:ext uri="{FF2B5EF4-FFF2-40B4-BE49-F238E27FC236}">
-                <a16:creationId xmlns:a16="http://schemas.microsoft.com/office/drawing/2014/main" id="{2892924E-06EE-40D6-9986-0E6FB1455F16}"/>
+                <a16:creationId xmlns:a16="http://schemas.microsoft.com/office/drawing/2014/main" id="{544500DB-AC9D-41E5-BC1C-1F56B3C809F7}"/>
               </a:ext>
             </a:extLst>
           </p:cNvPr>
@@ -4528,7 +4528,7 @@
           <p:cNvPr id="5" name="">
             <a:extLst xmlns:a="http://schemas.openxmlformats.org/drawingml/2006/main">
               <a:ext uri="{FF2B5EF4-FFF2-40B4-BE49-F238E27FC236}">
-                <a16:creationId xmlns:a16="http://schemas.microsoft.com/office/drawing/2014/main" id="{0D9EE204-F3C3-4EB8-B091-F196B9893650}"/>
+                <a16:creationId xmlns:a16="http://schemas.microsoft.com/office/drawing/2014/main" id="{518D74BB-126B-4C70-B41B-A6B1CC6B34EA}"/>
               </a:ext>
             </a:extLst>
           </p:cNvPr>
@@ -4585,7 +4585,7 @@
           <p:cNvPr id="6" name="">
             <a:extLst xmlns:a="http://schemas.openxmlformats.org/drawingml/2006/main">
               <a:ext uri="{FF2B5EF4-FFF2-40B4-BE49-F238E27FC236}">
-                <a16:creationId xmlns:a16="http://schemas.microsoft.com/office/drawing/2014/main" id="{867F0E73-0B42-40EB-9DF1-F9D4846885E4}"/>
+                <a16:creationId xmlns:a16="http://schemas.microsoft.com/office/drawing/2014/main" id="{F72253F0-773F-4042-8CD6-4502FE4C98D3}"/>
               </a:ext>
             </a:extLst>
           </p:cNvPr>
@@ -4642,7 +4642,7 @@
           <p:cNvPr id="7" name="">
             <a:extLst xmlns:a="http://schemas.openxmlformats.org/drawingml/2006/main">
               <a:ext uri="{FF2B5EF4-FFF2-40B4-BE49-F238E27FC236}">
-                <a16:creationId xmlns:a16="http://schemas.microsoft.com/office/drawing/2014/main" id="{1B2AD3CB-500A-4302-BB39-3A3DD86BECD3}"/>
+                <a16:creationId xmlns:a16="http://schemas.microsoft.com/office/drawing/2014/main" id="{2E200878-5A14-4E43-BD64-7625F6D2F4E9}"/>
               </a:ext>
             </a:extLst>
           </p:cNvPr>
@@ -4674,7 +4674,7 @@
           <p:cNvPr id="8" name="">
             <a:extLst xmlns:a="http://schemas.openxmlformats.org/drawingml/2006/main">
               <a:ext uri="{FF2B5EF4-FFF2-40B4-BE49-F238E27FC236}">
-                <a16:creationId xmlns:a16="http://schemas.microsoft.com/office/drawing/2014/main" id="{63F13E7A-52B1-4980-9056-1F7AA5643A93}"/>
+                <a16:creationId xmlns:a16="http://schemas.microsoft.com/office/drawing/2014/main" id="{46CF6052-C15C-4325-A1AF-EE689F19DCBE}"/>
               </a:ext>
             </a:extLst>
           </p:cNvPr>
@@ -4731,7 +4731,7 @@
           <p:cNvPr id="9" name="">
             <a:extLst xmlns:a="http://schemas.openxmlformats.org/drawingml/2006/main">
               <a:ext uri="{FF2B5EF4-FFF2-40B4-BE49-F238E27FC236}">
-                <a16:creationId xmlns:a16="http://schemas.microsoft.com/office/drawing/2014/main" id="{D4A377D7-A1EB-4676-A5C0-ADE264EA9EEE}"/>
+                <a16:creationId xmlns:a16="http://schemas.microsoft.com/office/drawing/2014/main" id="{64E93A48-C70B-4D37-BADB-C3E622B578C1}"/>
               </a:ext>
             </a:extLst>
           </p:cNvPr>
@@ -4788,7 +4788,7 @@
           <p:cNvPr id="10" name="">
             <a:extLst xmlns:a="http://schemas.openxmlformats.org/drawingml/2006/main">
               <a:ext uri="{FF2B5EF4-FFF2-40B4-BE49-F238E27FC236}">
-                <a16:creationId xmlns:a16="http://schemas.microsoft.com/office/drawing/2014/main" id="{ED3C89CF-BA60-4C0C-8085-9CF45B94E0DA}"/>
+                <a16:creationId xmlns:a16="http://schemas.microsoft.com/office/drawing/2014/main" id="{DDC4F0D9-C5B9-41D6-A4C5-7231104BCDE4}"/>
               </a:ext>
             </a:extLst>
           </p:cNvPr>
@@ -4822,7 +4822,7 @@
           <p:cNvPr id="11" name="">
             <a:extLst xmlns:a="http://schemas.openxmlformats.org/drawingml/2006/main">
               <a:ext uri="{FF2B5EF4-FFF2-40B4-BE49-F238E27FC236}">
-                <a16:creationId xmlns:a16="http://schemas.microsoft.com/office/drawing/2014/main" id="{2D207498-AEF6-4930-93D7-75035739A274}"/>
+                <a16:creationId xmlns:a16="http://schemas.microsoft.com/office/drawing/2014/main" id="{B03685ED-0530-48DE-A607-C9F2A0717C32}"/>
               </a:ext>
             </a:extLst>
           </p:cNvPr>
@@ -4854,7 +4854,7 @@
           <p:cNvPr id="12" name="">
             <a:extLst xmlns:a="http://schemas.openxmlformats.org/drawingml/2006/main">
               <a:ext uri="{FF2B5EF4-FFF2-40B4-BE49-F238E27FC236}">
-                <a16:creationId xmlns:a16="http://schemas.microsoft.com/office/drawing/2014/main" id="{461691E4-AFE4-4F2D-9207-6647672657B2}"/>
+                <a16:creationId xmlns:a16="http://schemas.microsoft.com/office/drawing/2014/main" id="{FD9583D6-E2DE-464B-806F-0703DC202CAD}"/>
               </a:ext>
             </a:extLst>
           </p:cNvPr>
@@ -4911,7 +4911,7 @@
           <p:cNvPr id="13" name="">
             <a:extLst xmlns:a="http://schemas.openxmlformats.org/drawingml/2006/main">
               <a:ext uri="{FF2B5EF4-FFF2-40B4-BE49-F238E27FC236}">
-                <a16:creationId xmlns:a16="http://schemas.microsoft.com/office/drawing/2014/main" id="{BBCCFB91-6DCB-4B0E-8D94-3258D273D150}"/>
+                <a16:creationId xmlns:a16="http://schemas.microsoft.com/office/drawing/2014/main" id="{C58D5CEB-CC8D-4E56-95B8-8B2CB5E8DCB6}"/>
               </a:ext>
             </a:extLst>
           </p:cNvPr>
@@ -4968,7 +4968,7 @@
           <p:cNvPr id="14" name="">
             <a:extLst xmlns:a="http://schemas.openxmlformats.org/drawingml/2006/main">
               <a:ext uri="{FF2B5EF4-FFF2-40B4-BE49-F238E27FC236}">
-                <a16:creationId xmlns:a16="http://schemas.microsoft.com/office/drawing/2014/main" id="{9FC5FCCC-EEA0-4055-B6AF-C2C8ADCECF00}"/>
+                <a16:creationId xmlns:a16="http://schemas.microsoft.com/office/drawing/2014/main" id="{2B8D1718-587E-461A-9960-96770DDF8EE6}"/>
               </a:ext>
             </a:extLst>
           </p:cNvPr>
@@ -5002,7 +5002,7 @@
           <p:cNvPr id="15" name="">
             <a:extLst xmlns:a="http://schemas.openxmlformats.org/drawingml/2006/main">
               <a:ext uri="{FF2B5EF4-FFF2-40B4-BE49-F238E27FC236}">
-                <a16:creationId xmlns:a16="http://schemas.microsoft.com/office/drawing/2014/main" id="{4734F06D-4B5C-43D5-9DB7-DF8507ABF09C}"/>
+                <a16:creationId xmlns:a16="http://schemas.microsoft.com/office/drawing/2014/main" id="{9034EE0E-A3DC-4D7D-A55C-6427CB4651AC}"/>
               </a:ext>
             </a:extLst>
           </p:cNvPr>
@@ -5034,7 +5034,7 @@
           <p:cNvPr id="16" name="">
             <a:extLst xmlns:a="http://schemas.openxmlformats.org/drawingml/2006/main">
               <a:ext uri="{FF2B5EF4-FFF2-40B4-BE49-F238E27FC236}">
-                <a16:creationId xmlns:a16="http://schemas.microsoft.com/office/drawing/2014/main" id="{8A6B9F15-7BFD-4CD7-87A2-816C34918AE9}"/>
+                <a16:creationId xmlns:a16="http://schemas.microsoft.com/office/drawing/2014/main" id="{777ED67E-1968-4DC9-9443-F407AA9E44FD}"/>
               </a:ext>
             </a:extLst>
           </p:cNvPr>
@@ -5091,7 +5091,7 @@
           <p:cNvPr id="17" name="">
             <a:extLst xmlns:a="http://schemas.openxmlformats.org/drawingml/2006/main">
               <a:ext uri="{FF2B5EF4-FFF2-40B4-BE49-F238E27FC236}">
-                <a16:creationId xmlns:a16="http://schemas.microsoft.com/office/drawing/2014/main" id="{910AAAC1-9E80-42ED-BEB6-4516529348F4}"/>
+                <a16:creationId xmlns:a16="http://schemas.microsoft.com/office/drawing/2014/main" id="{99D0EF49-9005-4431-9205-EBEFB0B76EF5}"/>
               </a:ext>
             </a:extLst>
           </p:cNvPr>
@@ -5148,7 +5148,7 @@
           <p:cNvPr id="18" name="">
             <a:extLst xmlns:a="http://schemas.openxmlformats.org/drawingml/2006/main">
               <a:ext uri="{FF2B5EF4-FFF2-40B4-BE49-F238E27FC236}">
-                <a16:creationId xmlns:a16="http://schemas.microsoft.com/office/drawing/2014/main" id="{BB36A859-2AEA-4612-A509-DB0A94A8D347}"/>
+                <a16:creationId xmlns:a16="http://schemas.microsoft.com/office/drawing/2014/main" id="{E6F473FB-DAC3-4087-A1FD-31BDF6615845}"/>
               </a:ext>
             </a:extLst>
           </p:cNvPr>
@@ -5182,7 +5182,7 @@
           <p:cNvPr id="19" name="">
             <a:extLst xmlns:a="http://schemas.openxmlformats.org/drawingml/2006/main">
               <a:ext uri="{FF2B5EF4-FFF2-40B4-BE49-F238E27FC236}">
-                <a16:creationId xmlns:a16="http://schemas.microsoft.com/office/drawing/2014/main" id="{CB8F4E59-364C-49D3-B168-9EC567F909B0}"/>
+                <a16:creationId xmlns:a16="http://schemas.microsoft.com/office/drawing/2014/main" id="{81B631D9-2DB7-40C3-8AD5-4A696202DF35}"/>
               </a:ext>
             </a:extLst>
           </p:cNvPr>
@@ -5214,7 +5214,7 @@
           <p:cNvPr id="20" name="">
             <a:extLst xmlns:a="http://schemas.openxmlformats.org/drawingml/2006/main">
               <a:ext uri="{FF2B5EF4-FFF2-40B4-BE49-F238E27FC236}">
-                <a16:creationId xmlns:a16="http://schemas.microsoft.com/office/drawing/2014/main" id="{8A3D1848-303F-4D5F-9B03-40EEAFCFDF2D}"/>
+                <a16:creationId xmlns:a16="http://schemas.microsoft.com/office/drawing/2014/main" id="{38D8581E-C09D-49DC-90D1-E513146F7DB6}"/>
               </a:ext>
             </a:extLst>
           </p:cNvPr>
@@ -5271,7 +5271,7 @@
           <p:cNvPr id="21" name="">
             <a:extLst xmlns:a="http://schemas.openxmlformats.org/drawingml/2006/main">
               <a:ext uri="{FF2B5EF4-FFF2-40B4-BE49-F238E27FC236}">
-                <a16:creationId xmlns:a16="http://schemas.microsoft.com/office/drawing/2014/main" id="{FF60C4E3-2B07-4E2B-94DE-CCA5AACF4636}"/>
+                <a16:creationId xmlns:a16="http://schemas.microsoft.com/office/drawing/2014/main" id="{F3CC98A7-3FF4-4508-A4F3-F24599133640}"/>
               </a:ext>
             </a:extLst>
           </p:cNvPr>
@@ -5328,7 +5328,7 @@
           <p:cNvPr id="22" name="">
             <a:extLst xmlns:a="http://schemas.openxmlformats.org/drawingml/2006/main">
               <a:ext uri="{FF2B5EF4-FFF2-40B4-BE49-F238E27FC236}">
-                <a16:creationId xmlns:a16="http://schemas.microsoft.com/office/drawing/2014/main" id="{62C50076-4AA7-42B5-AB45-B867DEE41851}"/>
+                <a16:creationId xmlns:a16="http://schemas.microsoft.com/office/drawing/2014/main" id="{44853EAA-CAE9-49A1-B383-73553243EEEA}"/>
               </a:ext>
             </a:extLst>
           </p:cNvPr>
@@ -5383,7 +5383,7 @@
     </p:spTree>
     <p:extLst>
       <p:ext uri="{BB962C8B-B14F-4D97-AF65-F5344CB8AC3E}">
-        <p14:creationId xmlns:p14="http://schemas.microsoft.com/office/powerpoint/2010/main" val="679447502"/>
+        <p14:creationId xmlns:p14="http://schemas.microsoft.com/office/powerpoint/2010/main" val="162719977"/>
       </p:ext>
     </p:extLst>
   </p:cSld>
@@ -5584,7 +5584,7 @@
           <p:cNvPr id="23" name="">
             <a:extLst xmlns:a="http://schemas.openxmlformats.org/drawingml/2006/main">
               <a:ext uri="{FF2B5EF4-FFF2-40B4-BE49-F238E27FC236}">
-                <a16:creationId xmlns:a16="http://schemas.microsoft.com/office/drawing/2014/main" id="{66CDF244-C22B-4F25-B230-6329E4E4CCC2}"/>
+                <a16:creationId xmlns:a16="http://schemas.microsoft.com/office/drawing/2014/main" id="{28E1E262-1174-42D1-BF01-162B331EC423}"/>
               </a:ext>
             </a:extLst>
           </p:cNvPr>
@@ -5616,7 +5616,7 @@
           <p:cNvPr id="2" name="">
             <a:extLst xmlns:a="http://schemas.openxmlformats.org/drawingml/2006/main">
               <a:ext uri="{FF2B5EF4-FFF2-40B4-BE49-F238E27FC236}">
-                <a16:creationId xmlns:a16="http://schemas.microsoft.com/office/drawing/2014/main" id="{93981272-A99D-44BF-9D50-246B4DBC7149}"/>
+                <a16:creationId xmlns:a16="http://schemas.microsoft.com/office/drawing/2014/main" id="{3AC12470-77AE-4B43-91AA-CFFC1CAD223F}"/>
               </a:ext>
             </a:extLst>
           </p:cNvPr>
@@ -5673,7 +5673,7 @@
           <p:cNvPr id="3" name="">
             <a:extLst xmlns:a="http://schemas.openxmlformats.org/drawingml/2006/main">
               <a:ext uri="{FF2B5EF4-FFF2-40B4-BE49-F238E27FC236}">
-                <a16:creationId xmlns:a16="http://schemas.microsoft.com/office/drawing/2014/main" id="{B2BC6F07-4DBE-40A2-977F-E5CF9DEA64D7}"/>
+                <a16:creationId xmlns:a16="http://schemas.microsoft.com/office/drawing/2014/main" id="{414FA6C9-219D-4125-AE6D-CB4872462E8C}"/>
               </a:ext>
             </a:extLst>
           </p:cNvPr>
@@ -5705,7 +5705,7 @@
           <p:cNvPr id="4" name="">
             <a:extLst xmlns:a="http://schemas.openxmlformats.org/drawingml/2006/main">
               <a:ext uri="{FF2B5EF4-FFF2-40B4-BE49-F238E27FC236}">
-                <a16:creationId xmlns:a16="http://schemas.microsoft.com/office/drawing/2014/main" id="{D2A40CB4-F845-4A16-9F73-44182A11D56D}"/>
+                <a16:creationId xmlns:a16="http://schemas.microsoft.com/office/drawing/2014/main" id="{4B5CC610-2952-4CB9-8FA4-924B8C9F9820}"/>
               </a:ext>
             </a:extLst>
           </p:cNvPr>
@@ -5762,7 +5762,7 @@
           <p:cNvPr id="5" name="">
             <a:extLst xmlns:a="http://schemas.openxmlformats.org/drawingml/2006/main">
               <a:ext uri="{FF2B5EF4-FFF2-40B4-BE49-F238E27FC236}">
-                <a16:creationId xmlns:a16="http://schemas.microsoft.com/office/drawing/2014/main" id="{664C6ED1-DB3A-4EA9-A3B2-6449F0115810}"/>
+                <a16:creationId xmlns:a16="http://schemas.microsoft.com/office/drawing/2014/main" id="{31DE3BD6-4178-43DF-8AFA-3685C83C2CD1}"/>
               </a:ext>
             </a:extLst>
           </p:cNvPr>
@@ -5819,7 +5819,7 @@
           <p:cNvPr id="6" name="">
             <a:extLst xmlns:a="http://schemas.openxmlformats.org/drawingml/2006/main">
               <a:ext uri="{FF2B5EF4-FFF2-40B4-BE49-F238E27FC236}">
-                <a16:creationId xmlns:a16="http://schemas.microsoft.com/office/drawing/2014/main" id="{2EA65DDC-9F84-49FD-91E1-F56D873A7930}"/>
+                <a16:creationId xmlns:a16="http://schemas.microsoft.com/office/drawing/2014/main" id="{AB967B5E-58BF-4FB1-A5A3-BA9B63BBF1E2}"/>
               </a:ext>
             </a:extLst>
           </p:cNvPr>
@@ -5876,7 +5876,7 @@
           <p:cNvPr id="7" name="">
             <a:extLst xmlns:a="http://schemas.openxmlformats.org/drawingml/2006/main">
               <a:ext uri="{FF2B5EF4-FFF2-40B4-BE49-F238E27FC236}">
-                <a16:creationId xmlns:a16="http://schemas.microsoft.com/office/drawing/2014/main" id="{C83C909D-5006-42A8-A3F9-A8581C264AAA}"/>
+                <a16:creationId xmlns:a16="http://schemas.microsoft.com/office/drawing/2014/main" id="{11D119B3-0EF6-45CD-860E-3B913EE92DC1}"/>
               </a:ext>
             </a:extLst>
           </p:cNvPr>
@@ -5908,7 +5908,7 @@
           <p:cNvPr id="8" name="">
             <a:extLst xmlns:a="http://schemas.openxmlformats.org/drawingml/2006/main">
               <a:ext uri="{FF2B5EF4-FFF2-40B4-BE49-F238E27FC236}">
-                <a16:creationId xmlns:a16="http://schemas.microsoft.com/office/drawing/2014/main" id="{F9B92B82-744D-4274-9CF4-A540E19C1818}"/>
+                <a16:creationId xmlns:a16="http://schemas.microsoft.com/office/drawing/2014/main" id="{647E020B-BF2F-475F-99DF-D83CA88F02A5}"/>
               </a:ext>
             </a:extLst>
           </p:cNvPr>
@@ -5965,7 +5965,7 @@
           <p:cNvPr id="9" name="">
             <a:extLst xmlns:a="http://schemas.openxmlformats.org/drawingml/2006/main">
               <a:ext uri="{FF2B5EF4-FFF2-40B4-BE49-F238E27FC236}">
-                <a16:creationId xmlns:a16="http://schemas.microsoft.com/office/drawing/2014/main" id="{B3553EB9-6B2C-4522-BA29-1342E1150487}"/>
+                <a16:creationId xmlns:a16="http://schemas.microsoft.com/office/drawing/2014/main" id="{07D9839E-DACD-46FC-A34D-830A0CE7BAFC}"/>
               </a:ext>
             </a:extLst>
           </p:cNvPr>
@@ -6022,7 +6022,7 @@
           <p:cNvPr id="10" name="">
             <a:extLst xmlns:a="http://schemas.openxmlformats.org/drawingml/2006/main">
               <a:ext uri="{FF2B5EF4-FFF2-40B4-BE49-F238E27FC236}">
-                <a16:creationId xmlns:a16="http://schemas.microsoft.com/office/drawing/2014/main" id="{290463C0-3108-4328-A78C-5A8EEEF24C1A}"/>
+                <a16:creationId xmlns:a16="http://schemas.microsoft.com/office/drawing/2014/main" id="{201161F8-89EE-4BFA-B53A-4AD6A6978E88}"/>
               </a:ext>
             </a:extLst>
           </p:cNvPr>
@@ -6056,7 +6056,7 @@
           <p:cNvPr id="11" name="">
             <a:extLst xmlns:a="http://schemas.openxmlformats.org/drawingml/2006/main">
               <a:ext uri="{FF2B5EF4-FFF2-40B4-BE49-F238E27FC236}">
-                <a16:creationId xmlns:a16="http://schemas.microsoft.com/office/drawing/2014/main" id="{E0CF48A5-3892-4734-93F7-929326ABF4BD}"/>
+                <a16:creationId xmlns:a16="http://schemas.microsoft.com/office/drawing/2014/main" id="{61A32E3C-66BC-437A-A871-55123E8CF1C1}"/>
               </a:ext>
             </a:extLst>
           </p:cNvPr>
@@ -6088,7 +6088,7 @@
           <p:cNvPr id="12" name="">
             <a:extLst xmlns:a="http://schemas.openxmlformats.org/drawingml/2006/main">
               <a:ext uri="{FF2B5EF4-FFF2-40B4-BE49-F238E27FC236}">
-                <a16:creationId xmlns:a16="http://schemas.microsoft.com/office/drawing/2014/main" id="{F5712040-50DC-4A52-B738-329EFAD55CA7}"/>
+                <a16:creationId xmlns:a16="http://schemas.microsoft.com/office/drawing/2014/main" id="{6B59704A-CC04-4E8D-93BE-9D0EF4CEEA16}"/>
               </a:ext>
             </a:extLst>
           </p:cNvPr>
@@ -6145,7 +6145,7 @@
           <p:cNvPr id="13" name="">
             <a:extLst xmlns:a="http://schemas.openxmlformats.org/drawingml/2006/main">
               <a:ext uri="{FF2B5EF4-FFF2-40B4-BE49-F238E27FC236}">
-                <a16:creationId xmlns:a16="http://schemas.microsoft.com/office/drawing/2014/main" id="{060D2063-3031-432D-A5B0-1AEB4F4E844C}"/>
+                <a16:creationId xmlns:a16="http://schemas.microsoft.com/office/drawing/2014/main" id="{5E5804BA-8D5C-46AF-B070-0839823A7937}"/>
               </a:ext>
             </a:extLst>
           </p:cNvPr>
@@ -6202,7 +6202,7 @@
           <p:cNvPr id="14" name="">
             <a:extLst xmlns:a="http://schemas.openxmlformats.org/drawingml/2006/main">
               <a:ext uri="{FF2B5EF4-FFF2-40B4-BE49-F238E27FC236}">
-                <a16:creationId xmlns:a16="http://schemas.microsoft.com/office/drawing/2014/main" id="{D0106EE7-9548-4857-B1CD-CCEB686FA7D5}"/>
+                <a16:creationId xmlns:a16="http://schemas.microsoft.com/office/drawing/2014/main" id="{61970223-35AC-485E-BBF7-EB143715B44E}"/>
               </a:ext>
             </a:extLst>
           </p:cNvPr>
@@ -6236,7 +6236,7 @@
           <p:cNvPr id="15" name="">
             <a:extLst xmlns:a="http://schemas.openxmlformats.org/drawingml/2006/main">
               <a:ext uri="{FF2B5EF4-FFF2-40B4-BE49-F238E27FC236}">
-                <a16:creationId xmlns:a16="http://schemas.microsoft.com/office/drawing/2014/main" id="{7647D261-8CEC-4423-9B58-6B59E6FBA22F}"/>
+                <a16:creationId xmlns:a16="http://schemas.microsoft.com/office/drawing/2014/main" id="{F1039C37-0EAF-4029-A7D2-8386E650396A}"/>
               </a:ext>
             </a:extLst>
           </p:cNvPr>
@@ -6268,7 +6268,7 @@
           <p:cNvPr id="16" name="">
             <a:extLst xmlns:a="http://schemas.openxmlformats.org/drawingml/2006/main">
               <a:ext uri="{FF2B5EF4-FFF2-40B4-BE49-F238E27FC236}">
-                <a16:creationId xmlns:a16="http://schemas.microsoft.com/office/drawing/2014/main" id="{AA49AC4D-74D5-49DF-9D10-90E78867BABE}"/>
+                <a16:creationId xmlns:a16="http://schemas.microsoft.com/office/drawing/2014/main" id="{07799CA8-AA01-45D1-88C1-A3E9DC871D01}"/>
               </a:ext>
             </a:extLst>
           </p:cNvPr>
@@ -6325,7 +6325,7 @@
           <p:cNvPr id="17" name="">
             <a:extLst xmlns:a="http://schemas.openxmlformats.org/drawingml/2006/main">
               <a:ext uri="{FF2B5EF4-FFF2-40B4-BE49-F238E27FC236}">
-                <a16:creationId xmlns:a16="http://schemas.microsoft.com/office/drawing/2014/main" id="{08C38D74-1A3C-4B23-B0D8-AA484701DB88}"/>
+                <a16:creationId xmlns:a16="http://schemas.microsoft.com/office/drawing/2014/main" id="{4091F86F-8A24-4D27-BA65-89B3CFB5807D}"/>
               </a:ext>
             </a:extLst>
           </p:cNvPr>
@@ -6382,7 +6382,7 @@
           <p:cNvPr id="18" name="">
             <a:extLst xmlns:a="http://schemas.openxmlformats.org/drawingml/2006/main">
               <a:ext uri="{FF2B5EF4-FFF2-40B4-BE49-F238E27FC236}">
-                <a16:creationId xmlns:a16="http://schemas.microsoft.com/office/drawing/2014/main" id="{A2CACD86-D65E-47B8-A2E1-F4F135EBDCD6}"/>
+                <a16:creationId xmlns:a16="http://schemas.microsoft.com/office/drawing/2014/main" id="{B172F755-56A6-4D9A-92C1-2365DAE073CE}"/>
               </a:ext>
             </a:extLst>
           </p:cNvPr>
@@ -6416,7 +6416,7 @@
           <p:cNvPr id="19" name="">
             <a:extLst xmlns:a="http://schemas.openxmlformats.org/drawingml/2006/main">
               <a:ext uri="{FF2B5EF4-FFF2-40B4-BE49-F238E27FC236}">
-                <a16:creationId xmlns:a16="http://schemas.microsoft.com/office/drawing/2014/main" id="{9D5C3364-0524-45F7-83DB-E907527814AC}"/>
+                <a16:creationId xmlns:a16="http://schemas.microsoft.com/office/drawing/2014/main" id="{87F182D2-B516-432A-8F9B-7BB99F17849C}"/>
               </a:ext>
             </a:extLst>
           </p:cNvPr>
@@ -6448,7 +6448,7 @@
           <p:cNvPr id="20" name="">
             <a:extLst xmlns:a="http://schemas.openxmlformats.org/drawingml/2006/main">
               <a:ext uri="{FF2B5EF4-FFF2-40B4-BE49-F238E27FC236}">
-                <a16:creationId xmlns:a16="http://schemas.microsoft.com/office/drawing/2014/main" id="{D28B4F3F-3953-4318-869B-201E17795668}"/>
+                <a16:creationId xmlns:a16="http://schemas.microsoft.com/office/drawing/2014/main" id="{D6760DC0-BDF5-437F-AB00-C27B11C44963}"/>
               </a:ext>
             </a:extLst>
           </p:cNvPr>
@@ -6505,7 +6505,7 @@
           <p:cNvPr id="21" name="">
             <a:extLst xmlns:a="http://schemas.openxmlformats.org/drawingml/2006/main">
               <a:ext uri="{FF2B5EF4-FFF2-40B4-BE49-F238E27FC236}">
-                <a16:creationId xmlns:a16="http://schemas.microsoft.com/office/drawing/2014/main" id="{1343F4EB-C156-4214-B9FF-E018273961C7}"/>
+                <a16:creationId xmlns:a16="http://schemas.microsoft.com/office/drawing/2014/main" id="{779BBB3B-5629-4FC8-A411-9C2BF7805ECD}"/>
               </a:ext>
             </a:extLst>
           </p:cNvPr>
@@ -6562,7 +6562,7 @@
           <p:cNvPr id="22" name="">
             <a:extLst xmlns:a="http://schemas.openxmlformats.org/drawingml/2006/main">
               <a:ext uri="{FF2B5EF4-FFF2-40B4-BE49-F238E27FC236}">
-                <a16:creationId xmlns:a16="http://schemas.microsoft.com/office/drawing/2014/main" id="{2B45565D-3236-4313-B8F8-973E07695BCB}"/>
+                <a16:creationId xmlns:a16="http://schemas.microsoft.com/office/drawing/2014/main" id="{49E13416-B13D-46CA-8D89-8FE24455247A}"/>
               </a:ext>
             </a:extLst>
           </p:cNvPr>
@@ -6617,7 +6617,7 @@
     </p:spTree>
     <p:extLst>
       <p:ext uri="{BB962C8B-B14F-4D97-AF65-F5344CB8AC3E}">
-        <p14:creationId xmlns:p14="http://schemas.microsoft.com/office/powerpoint/2010/main" val="531656001"/>
+        <p14:creationId xmlns:p14="http://schemas.microsoft.com/office/powerpoint/2010/main" val="1843413266"/>
       </p:ext>
     </p:extLst>
   </p:cSld>
@@ -6818,7 +6818,7 @@
           <p:cNvPr id="16" name="">
             <a:extLst xmlns:a="http://schemas.openxmlformats.org/drawingml/2006/main">
               <a:ext uri="{FF2B5EF4-FFF2-40B4-BE49-F238E27FC236}">
-                <a16:creationId xmlns:a16="http://schemas.microsoft.com/office/drawing/2014/main" id="{07A62028-D165-4309-80D1-B231FCB328CB}"/>
+                <a16:creationId xmlns:a16="http://schemas.microsoft.com/office/drawing/2014/main" id="{9A5468F7-CB8B-4160-927D-AD2E3CD59D77}"/>
               </a:ext>
             </a:extLst>
           </p:cNvPr>
@@ -6850,7 +6850,7 @@
           <p:cNvPr id="2" name="">
             <a:extLst xmlns:a="http://schemas.openxmlformats.org/drawingml/2006/main">
               <a:ext uri="{FF2B5EF4-FFF2-40B4-BE49-F238E27FC236}">
-                <a16:creationId xmlns:a16="http://schemas.microsoft.com/office/drawing/2014/main" id="{4724C398-5235-4F07-9783-3147F57701FC}"/>
+                <a16:creationId xmlns:a16="http://schemas.microsoft.com/office/drawing/2014/main" id="{ED575458-AAA2-4CE7-859D-9E004ECDFFC4}"/>
               </a:ext>
             </a:extLst>
           </p:cNvPr>
@@ -6907,7 +6907,7 @@
           <p:cNvPr id="3" name="">
             <a:extLst xmlns:a="http://schemas.openxmlformats.org/drawingml/2006/main">
               <a:ext uri="{FF2B5EF4-FFF2-40B4-BE49-F238E27FC236}">
-                <a16:creationId xmlns:a16="http://schemas.microsoft.com/office/drawing/2014/main" id="{3AF2204C-8E18-40A8-A310-38CB9A2AD37A}"/>
+                <a16:creationId xmlns:a16="http://schemas.microsoft.com/office/drawing/2014/main" id="{7C01D19C-2CA4-4400-8FBF-142860518592}"/>
               </a:ext>
             </a:extLst>
           </p:cNvPr>
@@ -6939,7 +6939,7 @@
           <p:cNvPr id="4" name="">
             <a:extLst xmlns:a="http://schemas.openxmlformats.org/drawingml/2006/main">
               <a:ext uri="{FF2B5EF4-FFF2-40B4-BE49-F238E27FC236}">
-                <a16:creationId xmlns:a16="http://schemas.microsoft.com/office/drawing/2014/main" id="{DBDF3DFD-AFF4-4EA4-9171-F1CAD735D533}"/>
+                <a16:creationId xmlns:a16="http://schemas.microsoft.com/office/drawing/2014/main" id="{2CD92EEC-AB69-4D2B-A193-9F4975C3D452}"/>
               </a:ext>
             </a:extLst>
           </p:cNvPr>
@@ -6996,7 +6996,7 @@
           <p:cNvPr id="5" name="">
             <a:extLst xmlns:a="http://schemas.openxmlformats.org/drawingml/2006/main">
               <a:ext uri="{FF2B5EF4-FFF2-40B4-BE49-F238E27FC236}">
-                <a16:creationId xmlns:a16="http://schemas.microsoft.com/office/drawing/2014/main" id="{97382EEC-1A8B-4520-9648-C4DBDF179417}"/>
+                <a16:creationId xmlns:a16="http://schemas.microsoft.com/office/drawing/2014/main" id="{4D5539AE-7F8A-4D50-8D02-AF80086387D0}"/>
               </a:ext>
             </a:extLst>
           </p:cNvPr>
@@ -7053,7 +7053,7 @@
           <p:cNvPr id="6" name="">
             <a:extLst xmlns:a="http://schemas.openxmlformats.org/drawingml/2006/main">
               <a:ext uri="{FF2B5EF4-FFF2-40B4-BE49-F238E27FC236}">
-                <a16:creationId xmlns:a16="http://schemas.microsoft.com/office/drawing/2014/main" id="{C0B17CBE-508F-46D1-A431-1CE62B6E601E}"/>
+                <a16:creationId xmlns:a16="http://schemas.microsoft.com/office/drawing/2014/main" id="{8C5BBDEB-E717-45F4-9429-145A40934030}"/>
               </a:ext>
             </a:extLst>
           </p:cNvPr>
@@ -7110,7 +7110,7 @@
           <p:cNvPr id="7" name="">
             <a:extLst xmlns:a="http://schemas.openxmlformats.org/drawingml/2006/main">
               <a:ext uri="{FF2B5EF4-FFF2-40B4-BE49-F238E27FC236}">
-                <a16:creationId xmlns:a16="http://schemas.microsoft.com/office/drawing/2014/main" id="{8614E5B8-0E2C-49E6-AFBB-9A247E4CD55D}"/>
+                <a16:creationId xmlns:a16="http://schemas.microsoft.com/office/drawing/2014/main" id="{F284B96C-579C-40E2-8EF7-4C7420523389}"/>
               </a:ext>
             </a:extLst>
           </p:cNvPr>
@@ -7142,7 +7142,7 @@
           <p:cNvPr id="8" name="">
             <a:extLst xmlns:a="http://schemas.openxmlformats.org/drawingml/2006/main">
               <a:ext uri="{FF2B5EF4-FFF2-40B4-BE49-F238E27FC236}">
-                <a16:creationId xmlns:a16="http://schemas.microsoft.com/office/drawing/2014/main" id="{5EE371CC-BDCB-411C-A242-9CE4D1F052F6}"/>
+                <a16:creationId xmlns:a16="http://schemas.microsoft.com/office/drawing/2014/main" id="{85A1CF55-DE7E-4204-9799-50CE3459D1C1}"/>
               </a:ext>
             </a:extLst>
           </p:cNvPr>
@@ -7199,7 +7199,7 @@
           <p:cNvPr id="9" name="">
             <a:extLst xmlns:a="http://schemas.openxmlformats.org/drawingml/2006/main">
               <a:ext uri="{FF2B5EF4-FFF2-40B4-BE49-F238E27FC236}">
-                <a16:creationId xmlns:a16="http://schemas.microsoft.com/office/drawing/2014/main" id="{3C8682C4-2562-4A33-9F4F-0853CC38922B}"/>
+                <a16:creationId xmlns:a16="http://schemas.microsoft.com/office/drawing/2014/main" id="{8F9767B8-311F-49F3-BAB5-6C20DEB0C62F}"/>
               </a:ext>
             </a:extLst>
           </p:cNvPr>
@@ -7256,7 +7256,7 @@
           <p:cNvPr id="10" name="">
             <a:extLst xmlns:a="http://schemas.openxmlformats.org/drawingml/2006/main">
               <a:ext uri="{FF2B5EF4-FFF2-40B4-BE49-F238E27FC236}">
-                <a16:creationId xmlns:a16="http://schemas.microsoft.com/office/drawing/2014/main" id="{F359BA3E-A99D-47F3-9AF9-430AEEF49A5E}"/>
+                <a16:creationId xmlns:a16="http://schemas.microsoft.com/office/drawing/2014/main" id="{80752225-1CED-4112-BADB-B80C578C6FEE}"/>
               </a:ext>
             </a:extLst>
           </p:cNvPr>
@@ -7313,7 +7313,7 @@
           <p:cNvPr id="11" name="">
             <a:extLst xmlns:a="http://schemas.openxmlformats.org/drawingml/2006/main">
               <a:ext uri="{FF2B5EF4-FFF2-40B4-BE49-F238E27FC236}">
-                <a16:creationId xmlns:a16="http://schemas.microsoft.com/office/drawing/2014/main" id="{6E0C2651-F611-4730-9890-EF9780305024}"/>
+                <a16:creationId xmlns:a16="http://schemas.microsoft.com/office/drawing/2014/main" id="{E5745E7F-323D-4662-BE9A-3B8061CCD234}"/>
               </a:ext>
             </a:extLst>
           </p:cNvPr>
@@ -7345,7 +7345,7 @@
           <p:cNvPr id="12" name="">
             <a:extLst xmlns:a="http://schemas.openxmlformats.org/drawingml/2006/main">
               <a:ext uri="{FF2B5EF4-FFF2-40B4-BE49-F238E27FC236}">
-                <a16:creationId xmlns:a16="http://schemas.microsoft.com/office/drawing/2014/main" id="{FE8481F0-88DF-4143-B6B1-65D51204094D}"/>
+                <a16:creationId xmlns:a16="http://schemas.microsoft.com/office/drawing/2014/main" id="{8D442055-A2D5-403B-84BD-3ED6512E6DC1}"/>
               </a:ext>
             </a:extLst>
           </p:cNvPr>
@@ -7402,7 +7402,7 @@
           <p:cNvPr id="13" name="">
             <a:extLst xmlns:a="http://schemas.openxmlformats.org/drawingml/2006/main">
               <a:ext uri="{FF2B5EF4-FFF2-40B4-BE49-F238E27FC236}">
-                <a16:creationId xmlns:a16="http://schemas.microsoft.com/office/drawing/2014/main" id="{87BBE744-52CF-4874-AAB6-30FA2D5DCEE4}"/>
+                <a16:creationId xmlns:a16="http://schemas.microsoft.com/office/drawing/2014/main" id="{2876ADDC-BEEB-4DCD-8434-8AB0019B73BC}"/>
               </a:ext>
             </a:extLst>
           </p:cNvPr>
@@ -7459,7 +7459,7 @@
           <p:cNvPr id="14" name="">
             <a:extLst xmlns:a="http://schemas.openxmlformats.org/drawingml/2006/main">
               <a:ext uri="{FF2B5EF4-FFF2-40B4-BE49-F238E27FC236}">
-                <a16:creationId xmlns:a16="http://schemas.microsoft.com/office/drawing/2014/main" id="{2BD2BD93-4FA7-4002-A8D2-E96295FCC29A}"/>
+                <a16:creationId xmlns:a16="http://schemas.microsoft.com/office/drawing/2014/main" id="{F0F92034-537F-46A3-A214-49A254634B4B}"/>
               </a:ext>
             </a:extLst>
           </p:cNvPr>
@@ -7516,7 +7516,7 @@
           <p:cNvPr id="15" name="">
             <a:extLst xmlns:a="http://schemas.openxmlformats.org/drawingml/2006/main">
               <a:ext uri="{FF2B5EF4-FFF2-40B4-BE49-F238E27FC236}">
-                <a16:creationId xmlns:a16="http://schemas.microsoft.com/office/drawing/2014/main" id="{39E5FC8C-5D7C-428A-B896-2BB44F9F26FE}"/>
+                <a16:creationId xmlns:a16="http://schemas.microsoft.com/office/drawing/2014/main" id="{5D330332-C2FD-41EE-B321-A11AC9215F4B}"/>
               </a:ext>
             </a:extLst>
           </p:cNvPr>
@@ -7571,7 +7571,7 @@
     </p:spTree>
     <p:extLst>
       <p:ext uri="{BB962C8B-B14F-4D97-AF65-F5344CB8AC3E}">
-        <p14:creationId xmlns:p14="http://schemas.microsoft.com/office/powerpoint/2010/main" val="385278342"/>
+        <p14:creationId xmlns:p14="http://schemas.microsoft.com/office/powerpoint/2010/main" val="315261523"/>
       </p:ext>
     </p:extLst>
   </p:cSld>
@@ -7772,7 +7772,7 @@
           <p:cNvPr id="23" name="">
             <a:extLst xmlns:a="http://schemas.openxmlformats.org/drawingml/2006/main">
               <a:ext uri="{FF2B5EF4-FFF2-40B4-BE49-F238E27FC236}">
-                <a16:creationId xmlns:a16="http://schemas.microsoft.com/office/drawing/2014/main" id="{D32E32D7-5493-482A-8BD9-784516A6ADCF}"/>
+                <a16:creationId xmlns:a16="http://schemas.microsoft.com/office/drawing/2014/main" id="{6E480026-85BA-4855-8C2F-CF7240CF05DE}"/>
               </a:ext>
             </a:extLst>
           </p:cNvPr>
@@ -7804,7 +7804,7 @@
           <p:cNvPr id="2" name="">
             <a:extLst xmlns:a="http://schemas.openxmlformats.org/drawingml/2006/main">
               <a:ext uri="{FF2B5EF4-FFF2-40B4-BE49-F238E27FC236}">
-                <a16:creationId xmlns:a16="http://schemas.microsoft.com/office/drawing/2014/main" id="{7101234F-EEC9-43A8-80F9-F6297E72E6E9}"/>
+                <a16:creationId xmlns:a16="http://schemas.microsoft.com/office/drawing/2014/main" id="{8B4394BC-3E5E-443C-8424-1DEEA7F2CD01}"/>
               </a:ext>
             </a:extLst>
           </p:cNvPr>
@@ -7861,7 +7861,7 @@
           <p:cNvPr id="3" name="">
             <a:extLst xmlns:a="http://schemas.openxmlformats.org/drawingml/2006/main">
               <a:ext uri="{FF2B5EF4-FFF2-40B4-BE49-F238E27FC236}">
-                <a16:creationId xmlns:a16="http://schemas.microsoft.com/office/drawing/2014/main" id="{4F976C87-F6C5-4D35-BFC2-9DBB5A49BA3E}"/>
+                <a16:creationId xmlns:a16="http://schemas.microsoft.com/office/drawing/2014/main" id="{2189A1E2-C204-4ED0-BBBD-8B1399DC540B}"/>
               </a:ext>
             </a:extLst>
           </p:cNvPr>
@@ -7893,7 +7893,7 @@
           <p:cNvPr id="4" name="">
             <a:extLst xmlns:a="http://schemas.openxmlformats.org/drawingml/2006/main">
               <a:ext uri="{FF2B5EF4-FFF2-40B4-BE49-F238E27FC236}">
-                <a16:creationId xmlns:a16="http://schemas.microsoft.com/office/drawing/2014/main" id="{A9A65CE0-6DFF-4DAE-8671-E5CB63BF74E8}"/>
+                <a16:creationId xmlns:a16="http://schemas.microsoft.com/office/drawing/2014/main" id="{285A31C6-053B-4F00-8AF0-9A1259EC2D48}"/>
               </a:ext>
             </a:extLst>
           </p:cNvPr>
@@ -7950,7 +7950,7 @@
           <p:cNvPr id="5" name="">
             <a:extLst xmlns:a="http://schemas.openxmlformats.org/drawingml/2006/main">
               <a:ext uri="{FF2B5EF4-FFF2-40B4-BE49-F238E27FC236}">
-                <a16:creationId xmlns:a16="http://schemas.microsoft.com/office/drawing/2014/main" id="{4E1C94E9-DBC1-403A-9014-D5237128DE16}"/>
+                <a16:creationId xmlns:a16="http://schemas.microsoft.com/office/drawing/2014/main" id="{407A8C87-3D74-4C38-9BE1-053AE2ED72B1}"/>
               </a:ext>
             </a:extLst>
           </p:cNvPr>
@@ -8007,7 +8007,7 @@
           <p:cNvPr id="6" name="">
             <a:extLst xmlns:a="http://schemas.openxmlformats.org/drawingml/2006/main">
               <a:ext uri="{FF2B5EF4-FFF2-40B4-BE49-F238E27FC236}">
-                <a16:creationId xmlns:a16="http://schemas.microsoft.com/office/drawing/2014/main" id="{0CC7DAC9-5696-469A-899C-7AAD9481CFB7}"/>
+                <a16:creationId xmlns:a16="http://schemas.microsoft.com/office/drawing/2014/main" id="{35F5E3D4-3400-4035-AFFC-91F3356C8A8D}"/>
               </a:ext>
             </a:extLst>
           </p:cNvPr>
@@ -8064,7 +8064,7 @@
           <p:cNvPr id="7" name="">
             <a:extLst xmlns:a="http://schemas.openxmlformats.org/drawingml/2006/main">
               <a:ext uri="{FF2B5EF4-FFF2-40B4-BE49-F238E27FC236}">
-                <a16:creationId xmlns:a16="http://schemas.microsoft.com/office/drawing/2014/main" id="{2F9F237F-F994-4D09-8390-C5F76645F2D3}"/>
+                <a16:creationId xmlns:a16="http://schemas.microsoft.com/office/drawing/2014/main" id="{AA57CB66-21D3-4B53-A3A7-622A8039D47F}"/>
               </a:ext>
             </a:extLst>
           </p:cNvPr>
@@ -8096,7 +8096,7 @@
           <p:cNvPr id="8" name="">
             <a:extLst xmlns:a="http://schemas.openxmlformats.org/drawingml/2006/main">
               <a:ext uri="{FF2B5EF4-FFF2-40B4-BE49-F238E27FC236}">
-                <a16:creationId xmlns:a16="http://schemas.microsoft.com/office/drawing/2014/main" id="{0FB8DBA4-E549-49A3-B230-2C3A78061AAC}"/>
+                <a16:creationId xmlns:a16="http://schemas.microsoft.com/office/drawing/2014/main" id="{F1100682-9DBE-45DD-9E72-0F242D7CD974}"/>
               </a:ext>
             </a:extLst>
           </p:cNvPr>
@@ -8153,7 +8153,7 @@
           <p:cNvPr id="9" name="">
             <a:extLst xmlns:a="http://schemas.openxmlformats.org/drawingml/2006/main">
               <a:ext uri="{FF2B5EF4-FFF2-40B4-BE49-F238E27FC236}">
-                <a16:creationId xmlns:a16="http://schemas.microsoft.com/office/drawing/2014/main" id="{6522E1C8-EB27-46FD-BCF8-6E11B03D95AE}"/>
+                <a16:creationId xmlns:a16="http://schemas.microsoft.com/office/drawing/2014/main" id="{EBC04D6E-FDA3-493A-B43C-7BF8E47A11B8}"/>
               </a:ext>
             </a:extLst>
           </p:cNvPr>
@@ -8210,19 +8210,19 @@
           <p:cNvPr id="10" name="">
             <a:extLst xmlns:a="http://schemas.openxmlformats.org/drawingml/2006/main">
               <a:ext uri="{FF2B5EF4-FFF2-40B4-BE49-F238E27FC236}">
-                <a16:creationId xmlns:a16="http://schemas.microsoft.com/office/drawing/2014/main" id="{1B55EF28-9DF7-44E5-9B26-F62DD394F8D1}"/>
-              </a:ext>
-            </a:extLst>
-          </p:cNvPr>
-          <p:cNvSpPr>
-            <a:spLocks xmlns:a="http://schemas.openxmlformats.org/drawingml/2006/main" noGrp="1"/>
-          </p:cNvSpPr>
-          <p:nvPr/>
-        </p:nvSpPr>
-        <p:spPr>
-          <a:xfrm xmlns:a="http://schemas.openxmlformats.org/drawingml/2006/main">
-            <a:off x="914400" y="1257300"/>
-            <a:ext cx="10363200" cy="781050"/>
+                <a16:creationId xmlns:a16="http://schemas.microsoft.com/office/drawing/2014/main" id="{D1D3A87F-D58F-4F99-BC8E-9E0AB1E3C483}"/>
+              </a:ext>
+            </a:extLst>
+          </p:cNvPr>
+          <p:cNvSpPr>
+            <a:spLocks xmlns:a="http://schemas.openxmlformats.org/drawingml/2006/main" noGrp="1"/>
+          </p:cNvSpPr>
+          <p:nvPr/>
+        </p:nvSpPr>
+        <p:spPr>
+          <a:xfrm xmlns:a="http://schemas.openxmlformats.org/drawingml/2006/main">
+            <a:off x="857250" y="1219200"/>
+            <a:ext cx="10477500" cy="742950"/>
           </a:xfrm>
           <a:prstGeom xmlns:a="http://schemas.openxmlformats.org/drawingml/2006/main" prst="rect">
             <a:avLst/>
@@ -8239,7 +8239,7 @@
           <a:lstStyle xmlns:a="http://schemas.openxmlformats.org/drawingml/2006/main"/>
           <a:p xmlns:a="http://schemas.openxmlformats.org/drawingml/2006/main">
             <a:pPr algn="ctr">
-              <a:defRPr sz="2175" b="1">
+              <a:defRPr sz="2100" b="1">
                 <a:solidFill>
                   <a:srgbClr val="17253A"/>
                 </a:solidFill>
@@ -8249,7 +8249,7 @@
               </a:defRPr>
             </a:pPr>
             <a:r>
-              <a:rPr sz="2175" b="1">
+              <a:rPr sz="2100" b="1">
                 <a:solidFill>
                   <a:srgbClr val="17253A"/>
                 </a:solidFill>
@@ -8267,28 +8267,30 @@
           <p:cNvPr id="11" name="">
             <a:extLst xmlns:a="http://schemas.openxmlformats.org/drawingml/2006/main">
               <a:ext uri="{FF2B5EF4-FFF2-40B4-BE49-F238E27FC236}">
-                <a16:creationId xmlns:a16="http://schemas.microsoft.com/office/drawing/2014/main" id="{4665564C-9651-43DA-9A0E-E882C65735E4}"/>
-              </a:ext>
-            </a:extLst>
-          </p:cNvPr>
-          <p:cNvSpPr>
-            <a:spLocks xmlns:a="http://schemas.openxmlformats.org/drawingml/2006/main" noGrp="1"/>
-          </p:cNvSpPr>
-          <p:nvPr/>
-        </p:nvSpPr>
-        <p:spPr>
-          <a:xfrm xmlns:a="http://schemas.openxmlformats.org/drawingml/2006/main">
-            <a:off x="1000125" y="2247900"/>
-            <a:ext cx="476250" cy="476250"/>
-          </a:xfrm>
-          <a:prstGeom xmlns:a="http://schemas.openxmlformats.org/drawingml/2006/main" prst="ellipse">
+                <a16:creationId xmlns:a16="http://schemas.microsoft.com/office/drawing/2014/main" id="{7A816C46-805B-424F-B3DC-C441448ABAE4}"/>
+              </a:ext>
+            </a:extLst>
+          </p:cNvPr>
+          <p:cNvSpPr>
+            <a:spLocks xmlns:a="http://schemas.openxmlformats.org/drawingml/2006/main" noGrp="1"/>
+          </p:cNvSpPr>
+          <p:nvPr/>
+        </p:nvSpPr>
+        <p:spPr>
+          <a:xfrm xmlns:a="http://schemas.openxmlformats.org/drawingml/2006/main">
+            <a:off x="971550" y="2124075"/>
+            <a:ext cx="38100" cy="3524250"/>
+          </a:xfrm>
+          <a:prstGeom xmlns:a="http://schemas.openxmlformats.org/drawingml/2006/main" prst="rect">
             <a:avLst/>
           </a:prstGeom>
           <a:solidFill xmlns:a="http://schemas.openxmlformats.org/drawingml/2006/main">
-            <a:srgbClr val="18324A"/>
+            <a:srgbClr val="2C6E73"/>
           </a:solidFill>
           <a:ln xmlns:a="http://schemas.openxmlformats.org/drawingml/2006/main" w="0">
-            <a:noFill/>
+            <a:solidFill>
+              <a:srgbClr val="2C6E73"/>
+            </a:solidFill>
           </a:ln>
         </p:spPr>
       </p:sp>
@@ -8297,19 +8299,19 @@
           <p:cNvPr id="12" name="">
             <a:extLst xmlns:a="http://schemas.openxmlformats.org/drawingml/2006/main">
               <a:ext uri="{FF2B5EF4-FFF2-40B4-BE49-F238E27FC236}">
-                <a16:creationId xmlns:a16="http://schemas.microsoft.com/office/drawing/2014/main" id="{0552D828-7111-41E3-8108-D569D0D8C07A}"/>
-              </a:ext>
-            </a:extLst>
-          </p:cNvPr>
-          <p:cNvSpPr>
-            <a:spLocks xmlns:a="http://schemas.openxmlformats.org/drawingml/2006/main" noGrp="1"/>
-          </p:cNvSpPr>
-          <p:nvPr/>
-        </p:nvSpPr>
-        <p:spPr>
-          <a:xfrm xmlns:a="http://schemas.openxmlformats.org/drawingml/2006/main">
-            <a:off x="1000125" y="2276475"/>
-            <a:ext cx="476250" cy="419100"/>
+                <a16:creationId xmlns:a16="http://schemas.microsoft.com/office/drawing/2014/main" id="{7F61FBEA-056B-4AA7-9904-0A1AB903C16A}"/>
+              </a:ext>
+            </a:extLst>
+          </p:cNvPr>
+          <p:cNvSpPr>
+            <a:spLocks xmlns:a="http://schemas.openxmlformats.org/drawingml/2006/main" noGrp="1"/>
+          </p:cNvSpPr>
+          <p:nvPr/>
+        </p:nvSpPr>
+        <p:spPr>
+          <a:xfrm xmlns:a="http://schemas.openxmlformats.org/drawingml/2006/main">
+            <a:off x="1162050" y="2200275"/>
+            <a:ext cx="400050" cy="400050"/>
           </a:xfrm>
           <a:prstGeom xmlns:a="http://schemas.openxmlformats.org/drawingml/2006/main" prst="rect">
             <a:avLst/>
@@ -8326,9 +8328,9 @@
           <a:lstStyle xmlns:a="http://schemas.openxmlformats.org/drawingml/2006/main"/>
           <a:p xmlns:a="http://schemas.openxmlformats.org/drawingml/2006/main">
             <a:pPr algn="ctr">
-              <a:defRPr sz="1350" b="1">
-                <a:solidFill>
-                  <a:srgbClr val="FFFFFF"/>
+              <a:defRPr sz="1125" b="1">
+                <a:solidFill>
+                  <a:srgbClr val="2C6E73"/>
                 </a:solidFill>
                 <a:latin typeface="Arial"/>
                 <a:ea typeface="Arial"/>
@@ -8336,9 +8338,9 @@
               </a:defRPr>
             </a:pPr>
             <a:r>
-              <a:rPr sz="1350" b="1">
-                <a:solidFill>
-                  <a:srgbClr val="FFFFFF"/>
+              <a:rPr sz="1125" b="1">
+                <a:solidFill>
+                  <a:srgbClr val="2C6E73"/>
                 </a:solidFill>
                 <a:latin typeface="Arial"/>
                 <a:ea typeface="Arial"/>
@@ -8354,19 +8356,19 @@
           <p:cNvPr id="13" name="">
             <a:extLst xmlns:a="http://schemas.openxmlformats.org/drawingml/2006/main">
               <a:ext uri="{FF2B5EF4-FFF2-40B4-BE49-F238E27FC236}">
-                <a16:creationId xmlns:a16="http://schemas.microsoft.com/office/drawing/2014/main" id="{F92DE408-390E-403E-889A-0E425D105652}"/>
-              </a:ext>
-            </a:extLst>
-          </p:cNvPr>
-          <p:cNvSpPr>
-            <a:spLocks xmlns:a="http://schemas.openxmlformats.org/drawingml/2006/main" noGrp="1"/>
-          </p:cNvSpPr>
-          <p:nvPr/>
-        </p:nvSpPr>
-        <p:spPr>
-          <a:xfrm xmlns:a="http://schemas.openxmlformats.org/drawingml/2006/main">
-            <a:off x="1714500" y="2181225"/>
-            <a:ext cx="9429750" cy="609600"/>
+                <a16:creationId xmlns:a16="http://schemas.microsoft.com/office/drawing/2014/main" id="{DA9DABC9-BE21-4435-BCDD-ED67DF6BC1A2}"/>
+              </a:ext>
+            </a:extLst>
+          </p:cNvPr>
+          <p:cNvSpPr>
+            <a:spLocks xmlns:a="http://schemas.openxmlformats.org/drawingml/2006/main" noGrp="1"/>
+          </p:cNvSpPr>
+          <p:nvPr/>
+        </p:nvSpPr>
+        <p:spPr>
+          <a:xfrm xmlns:a="http://schemas.openxmlformats.org/drawingml/2006/main">
+            <a:off x="1714500" y="2114550"/>
+            <a:ext cx="9525000" cy="809625"/>
           </a:xfrm>
           <a:prstGeom xmlns:a="http://schemas.openxmlformats.org/drawingml/2006/main" prst="rect">
             <a:avLst/>
@@ -8383,7 +8385,7 @@
           <a:lstStyle xmlns:a="http://schemas.openxmlformats.org/drawingml/2006/main"/>
           <a:p xmlns:a="http://schemas.openxmlformats.org/drawingml/2006/main">
             <a:pPr algn="l">
-              <a:defRPr sz="1500" b="0">
+              <a:defRPr sz="1725" b="0">
                 <a:solidFill>
                   <a:srgbClr val="17253A"/>
                 </a:solidFill>
@@ -8393,7 +8395,7 @@
               </a:defRPr>
             </a:pPr>
             <a:r>
-              <a:rPr sz="1500" b="0">
+              <a:rPr sz="1725" b="0">
                 <a:solidFill>
                   <a:srgbClr val="17253A"/>
                 </a:solidFill>
@@ -8401,7 +8403,7 @@
                 <a:ea typeface="Arial"/>
                 <a:cs typeface="Arial"/>
               </a:rPr>
-              <a:t>Identify the structure: Find a useful percentage such as 10%, 5% or 1%.</a:t>
+              <a:t>25% of 360</a:t>
             </a:r>
           </a:p>
         </p:txBody>
@@ -8411,28 +8413,30 @@
           <p:cNvPr id="14" name="">
             <a:extLst xmlns:a="http://schemas.openxmlformats.org/drawingml/2006/main">
               <a:ext uri="{FF2B5EF4-FFF2-40B4-BE49-F238E27FC236}">
-                <a16:creationId xmlns:a16="http://schemas.microsoft.com/office/drawing/2014/main" id="{8F03AAFF-7F0F-4AB3-A511-FD9CEBD6B906}"/>
-              </a:ext>
-            </a:extLst>
-          </p:cNvPr>
-          <p:cNvSpPr>
-            <a:spLocks xmlns:a="http://schemas.openxmlformats.org/drawingml/2006/main" noGrp="1"/>
-          </p:cNvSpPr>
-          <p:nvPr/>
-        </p:nvSpPr>
-        <p:spPr>
-          <a:xfrm xmlns:a="http://schemas.openxmlformats.org/drawingml/2006/main">
-            <a:off x="1000125" y="2990850"/>
-            <a:ext cx="476250" cy="476250"/>
-          </a:xfrm>
-          <a:prstGeom xmlns:a="http://schemas.openxmlformats.org/drawingml/2006/main" prst="ellipse">
+                <a16:creationId xmlns:a16="http://schemas.microsoft.com/office/drawing/2014/main" id="{8CEDCE8D-CA62-42F6-886C-7EAECCE7F7E8}"/>
+              </a:ext>
+            </a:extLst>
+          </p:cNvPr>
+          <p:cNvSpPr>
+            <a:spLocks xmlns:a="http://schemas.openxmlformats.org/drawingml/2006/main" noGrp="1"/>
+          </p:cNvSpPr>
+          <p:nvPr/>
+        </p:nvSpPr>
+        <p:spPr>
+          <a:xfrm xmlns:a="http://schemas.openxmlformats.org/drawingml/2006/main">
+            <a:off x="1714500" y="2943225"/>
+            <a:ext cx="9334500" cy="9525"/>
+          </a:xfrm>
+          <a:prstGeom xmlns:a="http://schemas.openxmlformats.org/drawingml/2006/main" prst="rect">
             <a:avLst/>
           </a:prstGeom>
           <a:solidFill xmlns:a="http://schemas.openxmlformats.org/drawingml/2006/main">
-            <a:srgbClr val="2C6E73"/>
+            <a:srgbClr val="D9E0E6"/>
           </a:solidFill>
           <a:ln xmlns:a="http://schemas.openxmlformats.org/drawingml/2006/main" w="0">
-            <a:noFill/>
+            <a:solidFill>
+              <a:srgbClr val="D9E0E6"/>
+            </a:solidFill>
           </a:ln>
         </p:spPr>
       </p:sp>
@@ -8441,19 +8445,19 @@
           <p:cNvPr id="15" name="">
             <a:extLst xmlns:a="http://schemas.openxmlformats.org/drawingml/2006/main">
               <a:ext uri="{FF2B5EF4-FFF2-40B4-BE49-F238E27FC236}">
-                <a16:creationId xmlns:a16="http://schemas.microsoft.com/office/drawing/2014/main" id="{9BB54AD9-A2A7-4A5E-A937-C01722DFDA88}"/>
-              </a:ext>
-            </a:extLst>
-          </p:cNvPr>
-          <p:cNvSpPr>
-            <a:spLocks xmlns:a="http://schemas.openxmlformats.org/drawingml/2006/main" noGrp="1"/>
-          </p:cNvSpPr>
-          <p:nvPr/>
-        </p:nvSpPr>
-        <p:spPr>
-          <a:xfrm xmlns:a="http://schemas.openxmlformats.org/drawingml/2006/main">
-            <a:off x="1000125" y="3019425"/>
-            <a:ext cx="476250" cy="419100"/>
+                <a16:creationId xmlns:a16="http://schemas.microsoft.com/office/drawing/2014/main" id="{7D2F2C86-A611-4341-B5BE-4F1C6A96FEB4}"/>
+              </a:ext>
+            </a:extLst>
+          </p:cNvPr>
+          <p:cNvSpPr>
+            <a:spLocks xmlns:a="http://schemas.openxmlformats.org/drawingml/2006/main" noGrp="1"/>
+          </p:cNvSpPr>
+          <p:nvPr/>
+        </p:nvSpPr>
+        <p:spPr>
+          <a:xfrm xmlns:a="http://schemas.openxmlformats.org/drawingml/2006/main">
+            <a:off x="1162050" y="3076575"/>
+            <a:ext cx="400050" cy="400050"/>
           </a:xfrm>
           <a:prstGeom xmlns:a="http://schemas.openxmlformats.org/drawingml/2006/main" prst="rect">
             <a:avLst/>
@@ -8470,9 +8474,9 @@
           <a:lstStyle xmlns:a="http://schemas.openxmlformats.org/drawingml/2006/main"/>
           <a:p xmlns:a="http://schemas.openxmlformats.org/drawingml/2006/main">
             <a:pPr algn="ctr">
-              <a:defRPr sz="1350" b="1">
-                <a:solidFill>
-                  <a:srgbClr val="FFFFFF"/>
+              <a:defRPr sz="1125" b="1">
+                <a:solidFill>
+                  <a:srgbClr val="2C6E73"/>
                 </a:solidFill>
                 <a:latin typeface="Arial"/>
                 <a:ea typeface="Arial"/>
@@ -8480,9 +8484,9 @@
               </a:defRPr>
             </a:pPr>
             <a:r>
-              <a:rPr sz="1350" b="1">
-                <a:solidFill>
-                  <a:srgbClr val="FFFFFF"/>
+              <a:rPr sz="1125" b="1">
+                <a:solidFill>
+                  <a:srgbClr val="2C6E73"/>
                 </a:solidFill>
                 <a:latin typeface="Arial"/>
                 <a:ea typeface="Arial"/>
@@ -8498,19 +8502,19 @@
           <p:cNvPr id="16" name="">
             <a:extLst xmlns:a="http://schemas.openxmlformats.org/drawingml/2006/main">
               <a:ext uri="{FF2B5EF4-FFF2-40B4-BE49-F238E27FC236}">
-                <a16:creationId xmlns:a16="http://schemas.microsoft.com/office/drawing/2014/main" id="{0824D663-0269-454A-B906-ADA62B02CA20}"/>
-              </a:ext>
-            </a:extLst>
-          </p:cNvPr>
-          <p:cNvSpPr>
-            <a:spLocks xmlns:a="http://schemas.openxmlformats.org/drawingml/2006/main" noGrp="1"/>
-          </p:cNvSpPr>
-          <p:nvPr/>
-        </p:nvSpPr>
-        <p:spPr>
-          <a:xfrm xmlns:a="http://schemas.openxmlformats.org/drawingml/2006/main">
-            <a:off x="1714500" y="2924175"/>
-            <a:ext cx="9429750" cy="609600"/>
+                <a16:creationId xmlns:a16="http://schemas.microsoft.com/office/drawing/2014/main" id="{5D06D686-06F0-47BE-A180-A8A59C474EDB}"/>
+              </a:ext>
+            </a:extLst>
+          </p:cNvPr>
+          <p:cNvSpPr>
+            <a:spLocks xmlns:a="http://schemas.openxmlformats.org/drawingml/2006/main" noGrp="1"/>
+          </p:cNvSpPr>
+          <p:nvPr/>
+        </p:nvSpPr>
+        <p:spPr>
+          <a:xfrm xmlns:a="http://schemas.openxmlformats.org/drawingml/2006/main">
+            <a:off x="1714500" y="2990850"/>
+            <a:ext cx="9525000" cy="809625"/>
           </a:xfrm>
           <a:prstGeom xmlns:a="http://schemas.openxmlformats.org/drawingml/2006/main" prst="rect">
             <a:avLst/>
@@ -8527,7 +8531,7 @@
           <a:lstStyle xmlns:a="http://schemas.openxmlformats.org/drawingml/2006/main"/>
           <a:p xmlns:a="http://schemas.openxmlformats.org/drawingml/2006/main">
             <a:pPr algn="l">
-              <a:defRPr sz="1500" b="0">
+              <a:defRPr sz="1725" b="0">
                 <a:solidFill>
                   <a:srgbClr val="17253A"/>
                 </a:solidFill>
@@ -8537,7 +8541,7 @@
               </a:defRPr>
             </a:pPr>
             <a:r>
-              <a:rPr sz="1500" b="0">
+              <a:rPr sz="1725" b="0">
                 <a:solidFill>
                   <a:srgbClr val="17253A"/>
                 </a:solidFill>
@@ -8545,7 +8549,7 @@
                 <a:ea typeface="Arial"/>
                 <a:cs typeface="Arial"/>
               </a:rPr>
-              <a:t>Set up the method: Combine or scale the known percentage to reach the required value.</a:t>
+              <a:t>25% = 1/4</a:t>
             </a:r>
           </a:p>
         </p:txBody>
@@ -8555,28 +8559,30 @@
           <p:cNvPr id="17" name="">
             <a:extLst xmlns:a="http://schemas.openxmlformats.org/drawingml/2006/main">
               <a:ext uri="{FF2B5EF4-FFF2-40B4-BE49-F238E27FC236}">
-                <a16:creationId xmlns:a16="http://schemas.microsoft.com/office/drawing/2014/main" id="{45DE9D61-748A-4D96-A4BE-C3FAC821B5F5}"/>
-              </a:ext>
-            </a:extLst>
-          </p:cNvPr>
-          <p:cNvSpPr>
-            <a:spLocks xmlns:a="http://schemas.openxmlformats.org/drawingml/2006/main" noGrp="1"/>
-          </p:cNvSpPr>
-          <p:nvPr/>
-        </p:nvSpPr>
-        <p:spPr>
-          <a:xfrm xmlns:a="http://schemas.openxmlformats.org/drawingml/2006/main">
-            <a:off x="1000125" y="3733800"/>
-            <a:ext cx="476250" cy="476250"/>
-          </a:xfrm>
-          <a:prstGeom xmlns:a="http://schemas.openxmlformats.org/drawingml/2006/main" prst="ellipse">
+                <a16:creationId xmlns:a16="http://schemas.microsoft.com/office/drawing/2014/main" id="{E47254E3-0C67-4711-9B34-9CF324487080}"/>
+              </a:ext>
+            </a:extLst>
+          </p:cNvPr>
+          <p:cNvSpPr>
+            <a:spLocks xmlns:a="http://schemas.openxmlformats.org/drawingml/2006/main" noGrp="1"/>
+          </p:cNvSpPr>
+          <p:nvPr/>
+        </p:nvSpPr>
+        <p:spPr>
+          <a:xfrm xmlns:a="http://schemas.openxmlformats.org/drawingml/2006/main">
+            <a:off x="1714500" y="3819525"/>
+            <a:ext cx="9334500" cy="9525"/>
+          </a:xfrm>
+          <a:prstGeom xmlns:a="http://schemas.openxmlformats.org/drawingml/2006/main" prst="rect">
             <a:avLst/>
           </a:prstGeom>
           <a:solidFill xmlns:a="http://schemas.openxmlformats.org/drawingml/2006/main">
-            <a:srgbClr val="2C6E73"/>
+            <a:srgbClr val="D9E0E6"/>
           </a:solidFill>
           <a:ln xmlns:a="http://schemas.openxmlformats.org/drawingml/2006/main" w="0">
-            <a:noFill/>
+            <a:solidFill>
+              <a:srgbClr val="D9E0E6"/>
+            </a:solidFill>
           </a:ln>
         </p:spPr>
       </p:sp>
@@ -8585,19 +8591,19 @@
           <p:cNvPr id="18" name="">
             <a:extLst xmlns:a="http://schemas.openxmlformats.org/drawingml/2006/main">
               <a:ext uri="{FF2B5EF4-FFF2-40B4-BE49-F238E27FC236}">
-                <a16:creationId xmlns:a16="http://schemas.microsoft.com/office/drawing/2014/main" id="{9CEE87D2-290F-4886-AF43-39A722D5D651}"/>
-              </a:ext>
-            </a:extLst>
-          </p:cNvPr>
-          <p:cNvSpPr>
-            <a:spLocks xmlns:a="http://schemas.openxmlformats.org/drawingml/2006/main" noGrp="1"/>
-          </p:cNvSpPr>
-          <p:nvPr/>
-        </p:nvSpPr>
-        <p:spPr>
-          <a:xfrm xmlns:a="http://schemas.openxmlformats.org/drawingml/2006/main">
-            <a:off x="1000125" y="3762375"/>
-            <a:ext cx="476250" cy="419100"/>
+                <a16:creationId xmlns:a16="http://schemas.microsoft.com/office/drawing/2014/main" id="{6BC0B478-B622-4DD8-B61D-DB5FCDBF85F1}"/>
+              </a:ext>
+            </a:extLst>
+          </p:cNvPr>
+          <p:cNvSpPr>
+            <a:spLocks xmlns:a="http://schemas.openxmlformats.org/drawingml/2006/main" noGrp="1"/>
+          </p:cNvSpPr>
+          <p:nvPr/>
+        </p:nvSpPr>
+        <p:spPr>
+          <a:xfrm xmlns:a="http://schemas.openxmlformats.org/drawingml/2006/main">
+            <a:off x="1162050" y="3952875"/>
+            <a:ext cx="400050" cy="400050"/>
           </a:xfrm>
           <a:prstGeom xmlns:a="http://schemas.openxmlformats.org/drawingml/2006/main" prst="rect">
             <a:avLst/>
@@ -8614,9 +8620,9 @@
           <a:lstStyle xmlns:a="http://schemas.openxmlformats.org/drawingml/2006/main"/>
           <a:p xmlns:a="http://schemas.openxmlformats.org/drawingml/2006/main">
             <a:pPr algn="ctr">
-              <a:defRPr sz="1350" b="1">
-                <a:solidFill>
-                  <a:srgbClr val="FFFFFF"/>
+              <a:defRPr sz="1125" b="1">
+                <a:solidFill>
+                  <a:srgbClr val="2C6E73"/>
                 </a:solidFill>
                 <a:latin typeface="Arial"/>
                 <a:ea typeface="Arial"/>
@@ -8624,9 +8630,9 @@
               </a:defRPr>
             </a:pPr>
             <a:r>
-              <a:rPr sz="1350" b="1">
-                <a:solidFill>
-                  <a:srgbClr val="FFFFFF"/>
+              <a:rPr sz="1125" b="1">
+                <a:solidFill>
+                  <a:srgbClr val="2C6E73"/>
                 </a:solidFill>
                 <a:latin typeface="Arial"/>
                 <a:ea typeface="Arial"/>
@@ -8642,19 +8648,19 @@
           <p:cNvPr id="19" name="">
             <a:extLst xmlns:a="http://schemas.openxmlformats.org/drawingml/2006/main">
               <a:ext uri="{FF2B5EF4-FFF2-40B4-BE49-F238E27FC236}">
-                <a16:creationId xmlns:a16="http://schemas.microsoft.com/office/drawing/2014/main" id="{36A1D941-2DEE-469D-AA1A-B9E8B551094D}"/>
-              </a:ext>
-            </a:extLst>
-          </p:cNvPr>
-          <p:cNvSpPr>
-            <a:spLocks xmlns:a="http://schemas.openxmlformats.org/drawingml/2006/main" noGrp="1"/>
-          </p:cNvSpPr>
-          <p:nvPr/>
-        </p:nvSpPr>
-        <p:spPr>
-          <a:xfrm xmlns:a="http://schemas.openxmlformats.org/drawingml/2006/main">
-            <a:off x="1714500" y="3667125"/>
-            <a:ext cx="9429750" cy="609600"/>
+                <a16:creationId xmlns:a16="http://schemas.microsoft.com/office/drawing/2014/main" id="{3CB1DE4F-E540-4C27-9524-98827AF80550}"/>
+              </a:ext>
+            </a:extLst>
+          </p:cNvPr>
+          <p:cNvSpPr>
+            <a:spLocks xmlns:a="http://schemas.openxmlformats.org/drawingml/2006/main" noGrp="1"/>
+          </p:cNvSpPr>
+          <p:nvPr/>
+        </p:nvSpPr>
+        <p:spPr>
+          <a:xfrm xmlns:a="http://schemas.openxmlformats.org/drawingml/2006/main">
+            <a:off x="1714500" y="3867150"/>
+            <a:ext cx="9525000" cy="809625"/>
           </a:xfrm>
           <a:prstGeom xmlns:a="http://schemas.openxmlformats.org/drawingml/2006/main" prst="rect">
             <a:avLst/>
@@ -8671,7 +8677,7 @@
           <a:lstStyle xmlns:a="http://schemas.openxmlformats.org/drawingml/2006/main"/>
           <a:p xmlns:a="http://schemas.openxmlformats.org/drawingml/2006/main">
             <a:pPr algn="l">
-              <a:defRPr sz="1500" b="0">
+              <a:defRPr sz="1725" b="0">
                 <a:solidFill>
                   <a:srgbClr val="17253A"/>
                 </a:solidFill>
@@ -8681,7 +8687,7 @@
               </a:defRPr>
             </a:pPr>
             <a:r>
-              <a:rPr sz="1500" b="0">
+              <a:rPr sz="1725" b="0">
                 <a:solidFill>
                   <a:srgbClr val="17253A"/>
                 </a:solidFill>
@@ -8689,7 +8695,7 @@
                 <a:ea typeface="Arial"/>
                 <a:cs typeface="Arial"/>
               </a:rPr>
-              <a:t>Complete the calculation: 90.</a:t>
+              <a:t>360 ÷ 4</a:t>
             </a:r>
           </a:p>
         </p:txBody>
@@ -8699,28 +8705,30 @@
           <p:cNvPr id="20" name="">
             <a:extLst xmlns:a="http://schemas.openxmlformats.org/drawingml/2006/main">
               <a:ext uri="{FF2B5EF4-FFF2-40B4-BE49-F238E27FC236}">
-                <a16:creationId xmlns:a16="http://schemas.microsoft.com/office/drawing/2014/main" id="{1E604E6C-FA4E-427D-A63A-69487FEE49DA}"/>
-              </a:ext>
-            </a:extLst>
-          </p:cNvPr>
-          <p:cNvSpPr>
-            <a:spLocks xmlns:a="http://schemas.openxmlformats.org/drawingml/2006/main" noGrp="1"/>
-          </p:cNvSpPr>
-          <p:nvPr/>
-        </p:nvSpPr>
-        <p:spPr>
-          <a:xfrm xmlns:a="http://schemas.openxmlformats.org/drawingml/2006/main">
-            <a:off x="1000125" y="4476750"/>
-            <a:ext cx="476250" cy="476250"/>
-          </a:xfrm>
-          <a:prstGeom xmlns:a="http://schemas.openxmlformats.org/drawingml/2006/main" prst="ellipse">
+                <a16:creationId xmlns:a16="http://schemas.microsoft.com/office/drawing/2014/main" id="{690A0C59-3C11-4E6A-9F80-DD4D3C358CF4}"/>
+              </a:ext>
+            </a:extLst>
+          </p:cNvPr>
+          <p:cNvSpPr>
+            <a:spLocks xmlns:a="http://schemas.openxmlformats.org/drawingml/2006/main" noGrp="1"/>
+          </p:cNvSpPr>
+          <p:nvPr/>
+        </p:nvSpPr>
+        <p:spPr>
+          <a:xfrm xmlns:a="http://schemas.openxmlformats.org/drawingml/2006/main">
+            <a:off x="1714500" y="4695825"/>
+            <a:ext cx="9334500" cy="9525"/>
+          </a:xfrm>
+          <a:prstGeom xmlns:a="http://schemas.openxmlformats.org/drawingml/2006/main" prst="rect">
             <a:avLst/>
           </a:prstGeom>
           <a:solidFill xmlns:a="http://schemas.openxmlformats.org/drawingml/2006/main">
-            <a:srgbClr val="2C6E73"/>
+            <a:srgbClr val="D9E0E6"/>
           </a:solidFill>
           <a:ln xmlns:a="http://schemas.openxmlformats.org/drawingml/2006/main" w="0">
-            <a:noFill/>
+            <a:solidFill>
+              <a:srgbClr val="D9E0E6"/>
+            </a:solidFill>
           </a:ln>
         </p:spPr>
       </p:sp>
@@ -8729,19 +8737,19 @@
           <p:cNvPr id="21" name="">
             <a:extLst xmlns:a="http://schemas.openxmlformats.org/drawingml/2006/main">
               <a:ext uri="{FF2B5EF4-FFF2-40B4-BE49-F238E27FC236}">
-                <a16:creationId xmlns:a16="http://schemas.microsoft.com/office/drawing/2014/main" id="{D9090B8B-4759-441A-A613-399E3CCC3140}"/>
-              </a:ext>
-            </a:extLst>
-          </p:cNvPr>
-          <p:cNvSpPr>
-            <a:spLocks xmlns:a="http://schemas.openxmlformats.org/drawingml/2006/main" noGrp="1"/>
-          </p:cNvSpPr>
-          <p:nvPr/>
-        </p:nvSpPr>
-        <p:spPr>
-          <a:xfrm xmlns:a="http://schemas.openxmlformats.org/drawingml/2006/main">
-            <a:off x="1000125" y="4505325"/>
-            <a:ext cx="476250" cy="419100"/>
+                <a16:creationId xmlns:a16="http://schemas.microsoft.com/office/drawing/2014/main" id="{62E2C8DA-3FC8-46EC-92F3-DB970756DD06}"/>
+              </a:ext>
+            </a:extLst>
+          </p:cNvPr>
+          <p:cNvSpPr>
+            <a:spLocks xmlns:a="http://schemas.openxmlformats.org/drawingml/2006/main" noGrp="1"/>
+          </p:cNvSpPr>
+          <p:nvPr/>
+        </p:nvSpPr>
+        <p:spPr>
+          <a:xfrm xmlns:a="http://schemas.openxmlformats.org/drawingml/2006/main">
+            <a:off x="1162050" y="4829175"/>
+            <a:ext cx="400050" cy="400050"/>
           </a:xfrm>
           <a:prstGeom xmlns:a="http://schemas.openxmlformats.org/drawingml/2006/main" prst="rect">
             <a:avLst/>
@@ -8758,9 +8766,9 @@
           <a:lstStyle xmlns:a="http://schemas.openxmlformats.org/drawingml/2006/main"/>
           <a:p xmlns:a="http://schemas.openxmlformats.org/drawingml/2006/main">
             <a:pPr algn="ctr">
-              <a:defRPr sz="1350" b="1">
-                <a:solidFill>
-                  <a:srgbClr val="FFFFFF"/>
+              <a:defRPr sz="1125" b="1">
+                <a:solidFill>
+                  <a:srgbClr val="2F785D"/>
                 </a:solidFill>
                 <a:latin typeface="Arial"/>
                 <a:ea typeface="Arial"/>
@@ -8768,9 +8776,9 @@
               </a:defRPr>
             </a:pPr>
             <a:r>
-              <a:rPr sz="1350" b="1">
-                <a:solidFill>
-                  <a:srgbClr val="FFFFFF"/>
+              <a:rPr sz="1125" b="1">
+                <a:solidFill>
+                  <a:srgbClr val="2F785D"/>
                 </a:solidFill>
                 <a:latin typeface="Arial"/>
                 <a:ea typeface="Arial"/>
@@ -8786,19 +8794,19 @@
           <p:cNvPr id="22" name="">
             <a:extLst xmlns:a="http://schemas.openxmlformats.org/drawingml/2006/main">
               <a:ext uri="{FF2B5EF4-FFF2-40B4-BE49-F238E27FC236}">
-                <a16:creationId xmlns:a16="http://schemas.microsoft.com/office/drawing/2014/main" id="{068C4DDC-294B-4401-87F8-7BD771FDCD66}"/>
-              </a:ext>
-            </a:extLst>
-          </p:cNvPr>
-          <p:cNvSpPr>
-            <a:spLocks xmlns:a="http://schemas.openxmlformats.org/drawingml/2006/main" noGrp="1"/>
-          </p:cNvSpPr>
-          <p:nvPr/>
-        </p:nvSpPr>
-        <p:spPr>
-          <a:xfrm xmlns:a="http://schemas.openxmlformats.org/drawingml/2006/main">
-            <a:off x="1714500" y="4410075"/>
-            <a:ext cx="9429750" cy="609600"/>
+                <a16:creationId xmlns:a16="http://schemas.microsoft.com/office/drawing/2014/main" id="{F2F24AE3-5B59-4809-9A02-26B59E1599D4}"/>
+              </a:ext>
+            </a:extLst>
+          </p:cNvPr>
+          <p:cNvSpPr>
+            <a:spLocks xmlns:a="http://schemas.openxmlformats.org/drawingml/2006/main" noGrp="1"/>
+          </p:cNvSpPr>
+          <p:nvPr/>
+        </p:nvSpPr>
+        <p:spPr>
+          <a:xfrm xmlns:a="http://schemas.openxmlformats.org/drawingml/2006/main">
+            <a:off x="1714500" y="4743450"/>
+            <a:ext cx="9525000" cy="809625"/>
           </a:xfrm>
           <a:prstGeom xmlns:a="http://schemas.openxmlformats.org/drawingml/2006/main" prst="rect">
             <a:avLst/>
@@ -8815,7 +8823,7 @@
           <a:lstStyle xmlns:a="http://schemas.openxmlformats.org/drawingml/2006/main"/>
           <a:p xmlns:a="http://schemas.openxmlformats.org/drawingml/2006/main">
             <a:pPr algn="l">
-              <a:defRPr sz="1500" b="1">
+              <a:defRPr sz="1725" b="1">
                 <a:solidFill>
                   <a:srgbClr val="2F785D"/>
                 </a:solidFill>
@@ -8825,7 +8833,7 @@
               </a:defRPr>
             </a:pPr>
             <a:r>
-              <a:rPr sz="1500" b="1">
+              <a:rPr sz="1725" b="1">
                 <a:solidFill>
                   <a:srgbClr val="2F785D"/>
                 </a:solidFill>
@@ -8833,7 +8841,7 @@
                 <a:ea typeface="Arial"/>
                 <a:cs typeface="Arial"/>
               </a:rPr>
-              <a:t>Check the result: Check the result against the whole amount and context.</a:t>
+              <a:t>90</a:t>
             </a:r>
           </a:p>
         </p:txBody>
@@ -8841,7 +8849,7 @@
     </p:spTree>
     <p:extLst>
       <p:ext uri="{BB962C8B-B14F-4D97-AF65-F5344CB8AC3E}">
-        <p14:creationId xmlns:p14="http://schemas.microsoft.com/office/powerpoint/2010/main" val="784638286"/>
+        <p14:creationId xmlns:p14="http://schemas.microsoft.com/office/powerpoint/2010/main" val="1165096052"/>
       </p:ext>
     </p:extLst>
   </p:cSld>
@@ -9134,7 +9142,7 @@
           <p:cNvPr id="15" name="">
             <a:extLst xmlns:a="http://schemas.openxmlformats.org/drawingml/2006/main">
               <a:ext uri="{FF2B5EF4-FFF2-40B4-BE49-F238E27FC236}">
-                <a16:creationId xmlns:a16="http://schemas.microsoft.com/office/drawing/2014/main" id="{DA502644-AE87-481C-8A68-9948C4AB02A0}"/>
+                <a16:creationId xmlns:a16="http://schemas.microsoft.com/office/drawing/2014/main" id="{332469BA-F787-4FEA-AD25-66FF41D25098}"/>
               </a:ext>
             </a:extLst>
           </p:cNvPr>
@@ -9166,7 +9174,7 @@
           <p:cNvPr id="2" name="">
             <a:extLst xmlns:a="http://schemas.openxmlformats.org/drawingml/2006/main">
               <a:ext uri="{FF2B5EF4-FFF2-40B4-BE49-F238E27FC236}">
-                <a16:creationId xmlns:a16="http://schemas.microsoft.com/office/drawing/2014/main" id="{42799B6E-5598-4D91-97DA-D2F4F7E42422}"/>
+                <a16:creationId xmlns:a16="http://schemas.microsoft.com/office/drawing/2014/main" id="{E1F4780E-E437-440C-B5F0-3280732F0E38}"/>
               </a:ext>
             </a:extLst>
           </p:cNvPr>
@@ -9223,7 +9231,7 @@
           <p:cNvPr id="3" name="">
             <a:extLst xmlns:a="http://schemas.openxmlformats.org/drawingml/2006/main">
               <a:ext uri="{FF2B5EF4-FFF2-40B4-BE49-F238E27FC236}">
-                <a16:creationId xmlns:a16="http://schemas.microsoft.com/office/drawing/2014/main" id="{95BD3DCF-2F1F-4B9B-A80B-5B76FADD5F43}"/>
+                <a16:creationId xmlns:a16="http://schemas.microsoft.com/office/drawing/2014/main" id="{6F7BAD09-FD29-49B2-987B-A12E180D8109}"/>
               </a:ext>
             </a:extLst>
           </p:cNvPr>
@@ -9255,7 +9263,7 @@
           <p:cNvPr id="4" name="">
             <a:extLst xmlns:a="http://schemas.openxmlformats.org/drawingml/2006/main">
               <a:ext uri="{FF2B5EF4-FFF2-40B4-BE49-F238E27FC236}">
-                <a16:creationId xmlns:a16="http://schemas.microsoft.com/office/drawing/2014/main" id="{C382065C-E89F-4152-959D-138B61533521}"/>
+                <a16:creationId xmlns:a16="http://schemas.microsoft.com/office/drawing/2014/main" id="{BE5EFD4D-3A8B-49F7-8D6E-F07C93835F87}"/>
               </a:ext>
             </a:extLst>
           </p:cNvPr>
@@ -9312,7 +9320,7 @@
           <p:cNvPr id="5" name="">
             <a:extLst xmlns:a="http://schemas.openxmlformats.org/drawingml/2006/main">
               <a:ext uri="{FF2B5EF4-FFF2-40B4-BE49-F238E27FC236}">
-                <a16:creationId xmlns:a16="http://schemas.microsoft.com/office/drawing/2014/main" id="{DE393D1E-AA0C-42E4-9E4F-5FA8BB983646}"/>
+                <a16:creationId xmlns:a16="http://schemas.microsoft.com/office/drawing/2014/main" id="{30C59584-E372-4CFF-A7E4-7E5A92762C5A}"/>
               </a:ext>
             </a:extLst>
           </p:cNvPr>
@@ -9369,7 +9377,7 @@
           <p:cNvPr id="6" name="">
             <a:extLst xmlns:a="http://schemas.openxmlformats.org/drawingml/2006/main">
               <a:ext uri="{FF2B5EF4-FFF2-40B4-BE49-F238E27FC236}">
-                <a16:creationId xmlns:a16="http://schemas.microsoft.com/office/drawing/2014/main" id="{022750CD-0103-44D7-8F96-DFB6C4F41E32}"/>
+                <a16:creationId xmlns:a16="http://schemas.microsoft.com/office/drawing/2014/main" id="{4385D753-5EB3-4FB1-9F5D-A14D7910F4CA}"/>
               </a:ext>
             </a:extLst>
           </p:cNvPr>
@@ -9426,7 +9434,7 @@
           <p:cNvPr id="7" name="">
             <a:extLst xmlns:a="http://schemas.openxmlformats.org/drawingml/2006/main">
               <a:ext uri="{FF2B5EF4-FFF2-40B4-BE49-F238E27FC236}">
-                <a16:creationId xmlns:a16="http://schemas.microsoft.com/office/drawing/2014/main" id="{F16CEE0A-3368-41AC-9A2D-63DEB1B4F70D}"/>
+                <a16:creationId xmlns:a16="http://schemas.microsoft.com/office/drawing/2014/main" id="{73A4641C-C054-4284-B16E-D0382A23CD15}"/>
               </a:ext>
             </a:extLst>
           </p:cNvPr>
@@ -9458,7 +9466,7 @@
           <p:cNvPr id="8" name="">
             <a:extLst xmlns:a="http://schemas.openxmlformats.org/drawingml/2006/main">
               <a:ext uri="{FF2B5EF4-FFF2-40B4-BE49-F238E27FC236}">
-                <a16:creationId xmlns:a16="http://schemas.microsoft.com/office/drawing/2014/main" id="{0F9ADAA1-3823-48D0-B1C9-85AE346687F4}"/>
+                <a16:creationId xmlns:a16="http://schemas.microsoft.com/office/drawing/2014/main" id="{75370546-F68F-4468-8F74-30F250D22182}"/>
               </a:ext>
             </a:extLst>
           </p:cNvPr>
@@ -9515,7 +9523,7 @@
           <p:cNvPr id="9" name="">
             <a:extLst xmlns:a="http://schemas.openxmlformats.org/drawingml/2006/main">
               <a:ext uri="{FF2B5EF4-FFF2-40B4-BE49-F238E27FC236}">
-                <a16:creationId xmlns:a16="http://schemas.microsoft.com/office/drawing/2014/main" id="{767042DC-FBD0-49B3-B450-8E999F43304B}"/>
+                <a16:creationId xmlns:a16="http://schemas.microsoft.com/office/drawing/2014/main" id="{DD0DDB95-79FC-4213-BAEA-CA06A0C63610}"/>
               </a:ext>
             </a:extLst>
           </p:cNvPr>
@@ -9572,7 +9580,7 @@
           <p:cNvPr id="10" name="">
             <a:extLst xmlns:a="http://schemas.openxmlformats.org/drawingml/2006/main">
               <a:ext uri="{FF2B5EF4-FFF2-40B4-BE49-F238E27FC236}">
-                <a16:creationId xmlns:a16="http://schemas.microsoft.com/office/drawing/2014/main" id="{13C25CDA-874C-470A-B19A-82D95AB84A20}"/>
+                <a16:creationId xmlns:a16="http://schemas.microsoft.com/office/drawing/2014/main" id="{E1CFA308-E9A0-441F-BA21-F2621886C1AD}"/>
               </a:ext>
             </a:extLst>
           </p:cNvPr>
@@ -9629,7 +9637,7 @@
           <p:cNvPr id="11" name="">
             <a:extLst xmlns:a="http://schemas.openxmlformats.org/drawingml/2006/main">
               <a:ext uri="{FF2B5EF4-FFF2-40B4-BE49-F238E27FC236}">
-                <a16:creationId xmlns:a16="http://schemas.microsoft.com/office/drawing/2014/main" id="{36FD47EB-8B84-4172-86F7-AF7200F61123}"/>
+                <a16:creationId xmlns:a16="http://schemas.microsoft.com/office/drawing/2014/main" id="{FA87B77B-4964-46A5-8DE8-D4C8154214D4}"/>
               </a:ext>
             </a:extLst>
           </p:cNvPr>
@@ -9686,7 +9694,7 @@
           <p:cNvPr id="12" name="">
             <a:extLst xmlns:a="http://schemas.openxmlformats.org/drawingml/2006/main">
               <a:ext uri="{FF2B5EF4-FFF2-40B4-BE49-F238E27FC236}">
-                <a16:creationId xmlns:a16="http://schemas.microsoft.com/office/drawing/2014/main" id="{75A0A4FA-668A-4013-9EC5-3B2097E327F6}"/>
+                <a16:creationId xmlns:a16="http://schemas.microsoft.com/office/drawing/2014/main" id="{8BB3D641-BFB8-49D6-9F2F-182E69AE2CDB}"/>
               </a:ext>
             </a:extLst>
           </p:cNvPr>
@@ -9718,7 +9726,7 @@
           <p:cNvPr id="13" name="">
             <a:extLst xmlns:a="http://schemas.openxmlformats.org/drawingml/2006/main">
               <a:ext uri="{FF2B5EF4-FFF2-40B4-BE49-F238E27FC236}">
-                <a16:creationId xmlns:a16="http://schemas.microsoft.com/office/drawing/2014/main" id="{A1653D8C-AAB1-4CDE-9CAC-EF607521CE8D}"/>
+                <a16:creationId xmlns:a16="http://schemas.microsoft.com/office/drawing/2014/main" id="{5C1B1337-620A-47CC-974F-D1446A5663E3}"/>
               </a:ext>
             </a:extLst>
           </p:cNvPr>
@@ -9775,7 +9783,7 @@
           <p:cNvPr id="14" name="">
             <a:extLst xmlns:a="http://schemas.openxmlformats.org/drawingml/2006/main">
               <a:ext uri="{FF2B5EF4-FFF2-40B4-BE49-F238E27FC236}">
-                <a16:creationId xmlns:a16="http://schemas.microsoft.com/office/drawing/2014/main" id="{C9D7432E-65DB-475C-B3B4-2B266BEF275A}"/>
+                <a16:creationId xmlns:a16="http://schemas.microsoft.com/office/drawing/2014/main" id="{E9F83359-278A-4701-87E9-C48A218D4F8C}"/>
               </a:ext>
             </a:extLst>
           </p:cNvPr>
@@ -9830,7 +9838,7 @@
     </p:spTree>
     <p:extLst>
       <p:ext uri="{BB962C8B-B14F-4D97-AF65-F5344CB8AC3E}">
-        <p14:creationId xmlns:p14="http://schemas.microsoft.com/office/powerpoint/2010/main" val="1724702653"/>
+        <p14:creationId xmlns:p14="http://schemas.microsoft.com/office/powerpoint/2010/main" val="247466418"/>
       </p:ext>
     </p:extLst>
   </p:cSld>
@@ -10031,7 +10039,7 @@
           <p:cNvPr id="16" name="">
             <a:extLst xmlns:a="http://schemas.openxmlformats.org/drawingml/2006/main">
               <a:ext uri="{FF2B5EF4-FFF2-40B4-BE49-F238E27FC236}">
-                <a16:creationId xmlns:a16="http://schemas.microsoft.com/office/drawing/2014/main" id="{1BCA23DE-FBFD-4FD9-AB45-634098A17039}"/>
+                <a16:creationId xmlns:a16="http://schemas.microsoft.com/office/drawing/2014/main" id="{3ECC9F9B-1168-41C9-B012-743A207D2DE5}"/>
               </a:ext>
             </a:extLst>
           </p:cNvPr>
@@ -10063,7 +10071,7 @@
           <p:cNvPr id="2" name="">
             <a:extLst xmlns:a="http://schemas.openxmlformats.org/drawingml/2006/main">
               <a:ext uri="{FF2B5EF4-FFF2-40B4-BE49-F238E27FC236}">
-                <a16:creationId xmlns:a16="http://schemas.microsoft.com/office/drawing/2014/main" id="{10B88385-3636-4D35-AA39-B6CB65B0C323}"/>
+                <a16:creationId xmlns:a16="http://schemas.microsoft.com/office/drawing/2014/main" id="{FC700C19-48B6-4383-B3D0-707F2A5CED81}"/>
               </a:ext>
             </a:extLst>
           </p:cNvPr>
@@ -10120,7 +10128,7 @@
           <p:cNvPr id="3" name="">
             <a:extLst xmlns:a="http://schemas.openxmlformats.org/drawingml/2006/main">
               <a:ext uri="{FF2B5EF4-FFF2-40B4-BE49-F238E27FC236}">
-                <a16:creationId xmlns:a16="http://schemas.microsoft.com/office/drawing/2014/main" id="{DB44D8BF-811D-4532-83C4-2391ECC982BB}"/>
+                <a16:creationId xmlns:a16="http://schemas.microsoft.com/office/drawing/2014/main" id="{611F311C-5DBB-4B0B-9C40-D8DE3256ECD0}"/>
               </a:ext>
             </a:extLst>
           </p:cNvPr>
@@ -10152,7 +10160,7 @@
           <p:cNvPr id="4" name="">
             <a:extLst xmlns:a="http://schemas.openxmlformats.org/drawingml/2006/main">
               <a:ext uri="{FF2B5EF4-FFF2-40B4-BE49-F238E27FC236}">
-                <a16:creationId xmlns:a16="http://schemas.microsoft.com/office/drawing/2014/main" id="{35EC7067-D51B-4ED3-81F1-0559C8D3E9F2}"/>
+                <a16:creationId xmlns:a16="http://schemas.microsoft.com/office/drawing/2014/main" id="{3C85B527-412F-44E5-AAA1-615FC8327925}"/>
               </a:ext>
             </a:extLst>
           </p:cNvPr>
@@ -10209,7 +10217,7 @@
           <p:cNvPr id="5" name="">
             <a:extLst xmlns:a="http://schemas.openxmlformats.org/drawingml/2006/main">
               <a:ext uri="{FF2B5EF4-FFF2-40B4-BE49-F238E27FC236}">
-                <a16:creationId xmlns:a16="http://schemas.microsoft.com/office/drawing/2014/main" id="{CC8E1961-8A7C-4616-93BD-DC9286FE1046}"/>
+                <a16:creationId xmlns:a16="http://schemas.microsoft.com/office/drawing/2014/main" id="{C5CA22CB-C173-4299-8AE6-BD9126E80C46}"/>
               </a:ext>
             </a:extLst>
           </p:cNvPr>
@@ -10266,7 +10274,7 @@
           <p:cNvPr id="6" name="">
             <a:extLst xmlns:a="http://schemas.openxmlformats.org/drawingml/2006/main">
               <a:ext uri="{FF2B5EF4-FFF2-40B4-BE49-F238E27FC236}">
-                <a16:creationId xmlns:a16="http://schemas.microsoft.com/office/drawing/2014/main" id="{EAEDF46C-9894-496F-B7E7-B5828C329C5E}"/>
+                <a16:creationId xmlns:a16="http://schemas.microsoft.com/office/drawing/2014/main" id="{7B1268B2-4015-4891-A961-2658565AE020}"/>
               </a:ext>
             </a:extLst>
           </p:cNvPr>
@@ -10323,7 +10331,7 @@
           <p:cNvPr id="7" name="">
             <a:extLst xmlns:a="http://schemas.openxmlformats.org/drawingml/2006/main">
               <a:ext uri="{FF2B5EF4-FFF2-40B4-BE49-F238E27FC236}">
-                <a16:creationId xmlns:a16="http://schemas.microsoft.com/office/drawing/2014/main" id="{CDE3C2B8-8F67-4FCA-B786-0042121A1F9F}"/>
+                <a16:creationId xmlns:a16="http://schemas.microsoft.com/office/drawing/2014/main" id="{9A39B949-97F7-49DD-80EE-9478E352E2B1}"/>
               </a:ext>
             </a:extLst>
           </p:cNvPr>
@@ -10355,7 +10363,7 @@
           <p:cNvPr id="8" name="">
             <a:extLst xmlns:a="http://schemas.openxmlformats.org/drawingml/2006/main">
               <a:ext uri="{FF2B5EF4-FFF2-40B4-BE49-F238E27FC236}">
-                <a16:creationId xmlns:a16="http://schemas.microsoft.com/office/drawing/2014/main" id="{31A502C9-6FEE-450B-AA67-F318C4F8D911}"/>
+                <a16:creationId xmlns:a16="http://schemas.microsoft.com/office/drawing/2014/main" id="{0CDA570C-4D5C-4BE0-B69E-9A1206994FEE}"/>
               </a:ext>
             </a:extLst>
           </p:cNvPr>
@@ -10412,7 +10420,7 @@
           <p:cNvPr id="9" name="">
             <a:extLst xmlns:a="http://schemas.openxmlformats.org/drawingml/2006/main">
               <a:ext uri="{FF2B5EF4-FFF2-40B4-BE49-F238E27FC236}">
-                <a16:creationId xmlns:a16="http://schemas.microsoft.com/office/drawing/2014/main" id="{B8E540A1-F5F7-4006-B689-56C120EBE7AC}"/>
+                <a16:creationId xmlns:a16="http://schemas.microsoft.com/office/drawing/2014/main" id="{4CAF9554-F43A-4254-92A2-D2A8E9D1D35F}"/>
               </a:ext>
             </a:extLst>
           </p:cNvPr>
@@ -10469,7 +10477,7 @@
           <p:cNvPr id="10" name="">
             <a:extLst xmlns:a="http://schemas.openxmlformats.org/drawingml/2006/main">
               <a:ext uri="{FF2B5EF4-FFF2-40B4-BE49-F238E27FC236}">
-                <a16:creationId xmlns:a16="http://schemas.microsoft.com/office/drawing/2014/main" id="{E82C188C-C91F-4001-A441-38B5B9A18329}"/>
+                <a16:creationId xmlns:a16="http://schemas.microsoft.com/office/drawing/2014/main" id="{7B045CD2-2EE3-4C8C-8D0F-9D61A4872CD1}"/>
               </a:ext>
             </a:extLst>
           </p:cNvPr>
@@ -10526,7 +10534,7 @@
           <p:cNvPr id="11" name="">
             <a:extLst xmlns:a="http://schemas.openxmlformats.org/drawingml/2006/main">
               <a:ext uri="{FF2B5EF4-FFF2-40B4-BE49-F238E27FC236}">
-                <a16:creationId xmlns:a16="http://schemas.microsoft.com/office/drawing/2014/main" id="{6F9E0840-B690-4732-9BB3-F60FFD9BF4C3}"/>
+                <a16:creationId xmlns:a16="http://schemas.microsoft.com/office/drawing/2014/main" id="{34D91935-83A9-4B7F-BB74-737E62222286}"/>
               </a:ext>
             </a:extLst>
           </p:cNvPr>
@@ -10583,7 +10591,7 @@
           <p:cNvPr id="12" name="">
             <a:extLst xmlns:a="http://schemas.openxmlformats.org/drawingml/2006/main">
               <a:ext uri="{FF2B5EF4-FFF2-40B4-BE49-F238E27FC236}">
-                <a16:creationId xmlns:a16="http://schemas.microsoft.com/office/drawing/2014/main" id="{D62CC530-922A-4A17-9036-CF097BA865B3}"/>
+                <a16:creationId xmlns:a16="http://schemas.microsoft.com/office/drawing/2014/main" id="{79177D20-6223-4F5F-829E-0CFC0B2802D2}"/>
               </a:ext>
             </a:extLst>
           </p:cNvPr>
@@ -10640,7 +10648,7 @@
           <p:cNvPr id="13" name="">
             <a:extLst xmlns:a="http://schemas.openxmlformats.org/drawingml/2006/main">
               <a:ext uri="{FF2B5EF4-FFF2-40B4-BE49-F238E27FC236}">
-                <a16:creationId xmlns:a16="http://schemas.microsoft.com/office/drawing/2014/main" id="{C77E8EE4-C8B6-4CF2-B347-7ACE17DCB4EE}"/>
+                <a16:creationId xmlns:a16="http://schemas.microsoft.com/office/drawing/2014/main" id="{09CF50FF-0945-4B3A-B36E-47B5324697B3}"/>
               </a:ext>
             </a:extLst>
           </p:cNvPr>
@@ -10697,7 +10705,7 @@
           <p:cNvPr id="14" name="">
             <a:extLst xmlns:a="http://schemas.openxmlformats.org/drawingml/2006/main">
               <a:ext uri="{FF2B5EF4-FFF2-40B4-BE49-F238E27FC236}">
-                <a16:creationId xmlns:a16="http://schemas.microsoft.com/office/drawing/2014/main" id="{60C83C73-F4F2-432B-B0A1-F34C7744368D}"/>
+                <a16:creationId xmlns:a16="http://schemas.microsoft.com/office/drawing/2014/main" id="{8CB92F8C-61C6-4785-B73E-D6130914C329}"/>
               </a:ext>
             </a:extLst>
           </p:cNvPr>
@@ -10754,7 +10762,7 @@
           <p:cNvPr id="15" name="">
             <a:extLst xmlns:a="http://schemas.openxmlformats.org/drawingml/2006/main">
               <a:ext uri="{FF2B5EF4-FFF2-40B4-BE49-F238E27FC236}">
-                <a16:creationId xmlns:a16="http://schemas.microsoft.com/office/drawing/2014/main" id="{94789069-6535-4363-855B-EBC278BEB047}"/>
+                <a16:creationId xmlns:a16="http://schemas.microsoft.com/office/drawing/2014/main" id="{B92289AC-F697-4686-9FF7-FD9F76DE0AB2}"/>
               </a:ext>
             </a:extLst>
           </p:cNvPr>
@@ -10809,7 +10817,7 @@
     </p:spTree>
     <p:extLst>
       <p:ext uri="{BB962C8B-B14F-4D97-AF65-F5344CB8AC3E}">
-        <p14:creationId xmlns:p14="http://schemas.microsoft.com/office/powerpoint/2010/main" val="210235529"/>
+        <p14:creationId xmlns:p14="http://schemas.microsoft.com/office/powerpoint/2010/main" val="64479888"/>
       </p:ext>
     </p:extLst>
   </p:cSld>
@@ -10964,7 +10972,7 @@
           <p:cNvPr id="16" name="">
             <a:extLst xmlns:a="http://schemas.openxmlformats.org/drawingml/2006/main">
               <a:ext uri="{FF2B5EF4-FFF2-40B4-BE49-F238E27FC236}">
-                <a16:creationId xmlns:a16="http://schemas.microsoft.com/office/drawing/2014/main" id="{AB455278-100C-46EB-BD79-D6AB78217EB6}"/>
+                <a16:creationId xmlns:a16="http://schemas.microsoft.com/office/drawing/2014/main" id="{4A0F43C5-B5EB-45E4-83F4-839CEF59B304}"/>
               </a:ext>
             </a:extLst>
           </p:cNvPr>
@@ -10996,7 +11004,7 @@
           <p:cNvPr id="2" name="">
             <a:extLst xmlns:a="http://schemas.openxmlformats.org/drawingml/2006/main">
               <a:ext uri="{FF2B5EF4-FFF2-40B4-BE49-F238E27FC236}">
-                <a16:creationId xmlns:a16="http://schemas.microsoft.com/office/drawing/2014/main" id="{43ADFAAA-347D-491C-A20C-DE15D973D18B}"/>
+                <a16:creationId xmlns:a16="http://schemas.microsoft.com/office/drawing/2014/main" id="{12C0349F-102D-418E-A2CF-ABCBD2DC4F4E}"/>
               </a:ext>
             </a:extLst>
           </p:cNvPr>
@@ -11053,7 +11061,7 @@
           <p:cNvPr id="3" name="">
             <a:extLst xmlns:a="http://schemas.openxmlformats.org/drawingml/2006/main">
               <a:ext uri="{FF2B5EF4-FFF2-40B4-BE49-F238E27FC236}">
-                <a16:creationId xmlns:a16="http://schemas.microsoft.com/office/drawing/2014/main" id="{1D6C2668-E676-4250-A64F-76FFEC1AFD55}"/>
+                <a16:creationId xmlns:a16="http://schemas.microsoft.com/office/drawing/2014/main" id="{8868A3E4-38BD-4142-86ED-6C57D0E514FC}"/>
               </a:ext>
             </a:extLst>
           </p:cNvPr>
@@ -11085,7 +11093,7 @@
           <p:cNvPr id="4" name="">
             <a:extLst xmlns:a="http://schemas.openxmlformats.org/drawingml/2006/main">
               <a:ext uri="{FF2B5EF4-FFF2-40B4-BE49-F238E27FC236}">
-                <a16:creationId xmlns:a16="http://schemas.microsoft.com/office/drawing/2014/main" id="{894E538B-28B0-4573-A304-26A3294B4B3A}"/>
+                <a16:creationId xmlns:a16="http://schemas.microsoft.com/office/drawing/2014/main" id="{DBE8D8A6-BD25-487C-ABEE-4E6F970EC05C}"/>
               </a:ext>
             </a:extLst>
           </p:cNvPr>
@@ -11142,7 +11150,7 @@
           <p:cNvPr id="5" name="">
             <a:extLst xmlns:a="http://schemas.openxmlformats.org/drawingml/2006/main">
               <a:ext uri="{FF2B5EF4-FFF2-40B4-BE49-F238E27FC236}">
-                <a16:creationId xmlns:a16="http://schemas.microsoft.com/office/drawing/2014/main" id="{3AED2316-B837-4DE2-A9A2-766452B8207E}"/>
+                <a16:creationId xmlns:a16="http://schemas.microsoft.com/office/drawing/2014/main" id="{B85756D7-A207-4726-886A-1ABE587A44E5}"/>
               </a:ext>
             </a:extLst>
           </p:cNvPr>
@@ -11199,7 +11207,7 @@
           <p:cNvPr id="6" name="">
             <a:extLst xmlns:a="http://schemas.openxmlformats.org/drawingml/2006/main">
               <a:ext uri="{FF2B5EF4-FFF2-40B4-BE49-F238E27FC236}">
-                <a16:creationId xmlns:a16="http://schemas.microsoft.com/office/drawing/2014/main" id="{EE138F94-51F0-45AC-8129-DB116458DE59}"/>
+                <a16:creationId xmlns:a16="http://schemas.microsoft.com/office/drawing/2014/main" id="{5284B625-6383-4745-90E6-CFCDC9965372}"/>
               </a:ext>
             </a:extLst>
           </p:cNvPr>
@@ -11256,7 +11264,7 @@
           <p:cNvPr id="7" name="">
             <a:extLst xmlns:a="http://schemas.openxmlformats.org/drawingml/2006/main">
               <a:ext uri="{FF2B5EF4-FFF2-40B4-BE49-F238E27FC236}">
-                <a16:creationId xmlns:a16="http://schemas.microsoft.com/office/drawing/2014/main" id="{6DECD749-C223-418A-B914-386C5C9B3229}"/>
+                <a16:creationId xmlns:a16="http://schemas.microsoft.com/office/drawing/2014/main" id="{62B2A4BA-FD27-4B3A-AB61-448C17354E26}"/>
               </a:ext>
             </a:extLst>
           </p:cNvPr>
@@ -11288,7 +11296,7 @@
           <p:cNvPr id="8" name="">
             <a:extLst xmlns:a="http://schemas.openxmlformats.org/drawingml/2006/main">
               <a:ext uri="{FF2B5EF4-FFF2-40B4-BE49-F238E27FC236}">
-                <a16:creationId xmlns:a16="http://schemas.microsoft.com/office/drawing/2014/main" id="{05FB55AD-FED9-4BC5-A5CA-C6E9AA88F691}"/>
+                <a16:creationId xmlns:a16="http://schemas.microsoft.com/office/drawing/2014/main" id="{8A9DF385-098B-48A1-9560-148C3B1E176E}"/>
               </a:ext>
             </a:extLst>
           </p:cNvPr>
@@ -11345,7 +11353,7 @@
           <p:cNvPr id="9" name="">
             <a:extLst xmlns:a="http://schemas.openxmlformats.org/drawingml/2006/main">
               <a:ext uri="{FF2B5EF4-FFF2-40B4-BE49-F238E27FC236}">
-                <a16:creationId xmlns:a16="http://schemas.microsoft.com/office/drawing/2014/main" id="{6BF9F7B9-F978-43EC-B3EA-532E06FE6A5A}"/>
+                <a16:creationId xmlns:a16="http://schemas.microsoft.com/office/drawing/2014/main" id="{C8A3B307-C00E-4029-8239-748689870CFA}"/>
               </a:ext>
             </a:extLst>
           </p:cNvPr>
@@ -11406,7 +11414,7 @@
           <p:nvPr/>
         </p:nvPicPr>
         <p:blipFill>
-          <a:blip xmlns:r="http://schemas.openxmlformats.org/officeDocument/2006/relationships" xmlns:a="http://schemas.openxmlformats.org/drawingml/2006/main" r:embed="Rce9216cdfea14544"/>
+          <a:blip xmlns:r="http://schemas.openxmlformats.org/officeDocument/2006/relationships" xmlns:a="http://schemas.openxmlformats.org/drawingml/2006/main" r:embed="Rd58ff80e62c641f3"/>
           <a:stretch xmlns:a="http://schemas.openxmlformats.org/drawingml/2006/main"/>
         </p:blipFill>
         <p:spPr>
@@ -11424,7 +11432,7 @@
           <p:cNvPr id="11" name="">
             <a:extLst xmlns:a="http://schemas.openxmlformats.org/drawingml/2006/main">
               <a:ext uri="{FF2B5EF4-FFF2-40B4-BE49-F238E27FC236}">
-                <a16:creationId xmlns:a16="http://schemas.microsoft.com/office/drawing/2014/main" id="{851DEEAB-6BF7-4143-8C15-B636D9582AEC}"/>
+                <a16:creationId xmlns:a16="http://schemas.microsoft.com/office/drawing/2014/main" id="{D7404A79-C543-4BE0-A6F5-158D68A1B220}"/>
               </a:ext>
             </a:extLst>
           </p:cNvPr>
@@ -11481,7 +11489,7 @@
           <p:cNvPr id="12" name="">
             <a:extLst xmlns:a="http://schemas.openxmlformats.org/drawingml/2006/main">
               <a:ext uri="{FF2B5EF4-FFF2-40B4-BE49-F238E27FC236}">
-                <a16:creationId xmlns:a16="http://schemas.microsoft.com/office/drawing/2014/main" id="{2183B9A9-55AD-4CD4-908B-4A5364121945}"/>
+                <a16:creationId xmlns:a16="http://schemas.microsoft.com/office/drawing/2014/main" id="{93BFF246-F414-4F2C-93AB-0E62360FED6B}"/>
               </a:ext>
             </a:extLst>
           </p:cNvPr>
@@ -11538,7 +11546,7 @@
           <p:cNvPr id="13" name="">
             <a:extLst xmlns:a="http://schemas.openxmlformats.org/drawingml/2006/main">
               <a:ext uri="{FF2B5EF4-FFF2-40B4-BE49-F238E27FC236}">
-                <a16:creationId xmlns:a16="http://schemas.microsoft.com/office/drawing/2014/main" id="{9DAAD51B-4839-4E51-8D44-03313CB4AB03}"/>
+                <a16:creationId xmlns:a16="http://schemas.microsoft.com/office/drawing/2014/main" id="{7C84E6D6-5610-4D0C-93CC-B9F87781577A}"/>
               </a:ext>
             </a:extLst>
           </p:cNvPr>
@@ -11570,7 +11578,7 @@
           <p:cNvPr id="14" name="">
             <a:extLst xmlns:a="http://schemas.openxmlformats.org/drawingml/2006/main">
               <a:ext uri="{FF2B5EF4-FFF2-40B4-BE49-F238E27FC236}">
-                <a16:creationId xmlns:a16="http://schemas.microsoft.com/office/drawing/2014/main" id="{7AC3CD19-E21A-436D-94B1-91401DDB78AD}"/>
+                <a16:creationId xmlns:a16="http://schemas.microsoft.com/office/drawing/2014/main" id="{DF3F7839-85C0-4360-9599-14658A56C79F}"/>
               </a:ext>
             </a:extLst>
           </p:cNvPr>
@@ -11627,7 +11635,7 @@
           <p:cNvPr id="15" name="">
             <a:extLst xmlns:a="http://schemas.openxmlformats.org/drawingml/2006/main">
               <a:ext uri="{FF2B5EF4-FFF2-40B4-BE49-F238E27FC236}">
-                <a16:creationId xmlns:a16="http://schemas.microsoft.com/office/drawing/2014/main" id="{47F7B1F2-34E6-494C-BFFC-C896D573F097}"/>
+                <a16:creationId xmlns:a16="http://schemas.microsoft.com/office/drawing/2014/main" id="{DC822155-2986-42FF-AAF7-E6FACBA08F30}"/>
               </a:ext>
             </a:extLst>
           </p:cNvPr>
@@ -11682,7 +11690,7 @@
     </p:spTree>
     <p:extLst>
       <p:ext uri="{BB962C8B-B14F-4D97-AF65-F5344CB8AC3E}">
-        <p14:creationId xmlns:p14="http://schemas.microsoft.com/office/powerpoint/2010/main" val="576850320"/>
+        <p14:creationId xmlns:p14="http://schemas.microsoft.com/office/powerpoint/2010/main" val="1037030753"/>
       </p:ext>
     </p:extLst>
   </p:cSld>
@@ -11837,7 +11845,7 @@
           <p:cNvPr id="23" name="">
             <a:extLst xmlns:a="http://schemas.openxmlformats.org/drawingml/2006/main">
               <a:ext uri="{FF2B5EF4-FFF2-40B4-BE49-F238E27FC236}">
-                <a16:creationId xmlns:a16="http://schemas.microsoft.com/office/drawing/2014/main" id="{56965408-D58A-4DCF-9F43-7212838159EC}"/>
+                <a16:creationId xmlns:a16="http://schemas.microsoft.com/office/drawing/2014/main" id="{AEA98716-44B1-4628-A404-B2A3E4F47846}"/>
               </a:ext>
             </a:extLst>
           </p:cNvPr>
@@ -11869,7 +11877,7 @@
           <p:cNvPr id="2" name="">
             <a:extLst xmlns:a="http://schemas.openxmlformats.org/drawingml/2006/main">
               <a:ext uri="{FF2B5EF4-FFF2-40B4-BE49-F238E27FC236}">
-                <a16:creationId xmlns:a16="http://schemas.microsoft.com/office/drawing/2014/main" id="{70E27027-B4CD-47A9-963E-8D155BAB9E0D}"/>
+                <a16:creationId xmlns:a16="http://schemas.microsoft.com/office/drawing/2014/main" id="{92E9B9E0-EF53-4740-8737-7093BA119CAB}"/>
               </a:ext>
             </a:extLst>
           </p:cNvPr>
@@ -11926,7 +11934,7 @@
           <p:cNvPr id="3" name="">
             <a:extLst xmlns:a="http://schemas.openxmlformats.org/drawingml/2006/main">
               <a:ext uri="{FF2B5EF4-FFF2-40B4-BE49-F238E27FC236}">
-                <a16:creationId xmlns:a16="http://schemas.microsoft.com/office/drawing/2014/main" id="{2C4FBC74-AD84-4655-BB4B-CCA2E157786C}"/>
+                <a16:creationId xmlns:a16="http://schemas.microsoft.com/office/drawing/2014/main" id="{8C1D6A3E-E83F-45E5-9052-1E39F136FFDE}"/>
               </a:ext>
             </a:extLst>
           </p:cNvPr>
@@ -11958,7 +11966,7 @@
           <p:cNvPr id="4" name="">
             <a:extLst xmlns:a="http://schemas.openxmlformats.org/drawingml/2006/main">
               <a:ext uri="{FF2B5EF4-FFF2-40B4-BE49-F238E27FC236}">
-                <a16:creationId xmlns:a16="http://schemas.microsoft.com/office/drawing/2014/main" id="{C20BD8B3-1E3C-46EB-9B3E-2D3654B080DC}"/>
+                <a16:creationId xmlns:a16="http://schemas.microsoft.com/office/drawing/2014/main" id="{E6BBA2D0-83C8-453B-8C1C-BC864AE5E8DF}"/>
               </a:ext>
             </a:extLst>
           </p:cNvPr>
@@ -12015,7 +12023,7 @@
           <p:cNvPr id="5" name="">
             <a:extLst xmlns:a="http://schemas.openxmlformats.org/drawingml/2006/main">
               <a:ext uri="{FF2B5EF4-FFF2-40B4-BE49-F238E27FC236}">
-                <a16:creationId xmlns:a16="http://schemas.microsoft.com/office/drawing/2014/main" id="{37FB4A96-FAD3-4906-BCA4-4A461CE535DF}"/>
+                <a16:creationId xmlns:a16="http://schemas.microsoft.com/office/drawing/2014/main" id="{75E03368-0E1E-4C26-B6F3-715401AF7BCF}"/>
               </a:ext>
             </a:extLst>
           </p:cNvPr>
@@ -12072,7 +12080,7 @@
           <p:cNvPr id="6" name="">
             <a:extLst xmlns:a="http://schemas.openxmlformats.org/drawingml/2006/main">
               <a:ext uri="{FF2B5EF4-FFF2-40B4-BE49-F238E27FC236}">
-                <a16:creationId xmlns:a16="http://schemas.microsoft.com/office/drawing/2014/main" id="{ACE679D2-C8C6-44E0-A487-9196A239F4B7}"/>
+                <a16:creationId xmlns:a16="http://schemas.microsoft.com/office/drawing/2014/main" id="{CFCAA08F-69CB-480A-BA22-2D5A66EF5B55}"/>
               </a:ext>
             </a:extLst>
           </p:cNvPr>
@@ -12129,7 +12137,7 @@
           <p:cNvPr id="7" name="">
             <a:extLst xmlns:a="http://schemas.openxmlformats.org/drawingml/2006/main">
               <a:ext uri="{FF2B5EF4-FFF2-40B4-BE49-F238E27FC236}">
-                <a16:creationId xmlns:a16="http://schemas.microsoft.com/office/drawing/2014/main" id="{A4F477D1-D15B-4B7F-9ED7-D881499E81DB}"/>
+                <a16:creationId xmlns:a16="http://schemas.microsoft.com/office/drawing/2014/main" id="{1E35C4FB-1BF8-4A4C-867B-01107A2F5997}"/>
               </a:ext>
             </a:extLst>
           </p:cNvPr>
@@ -12161,7 +12169,7 @@
           <p:cNvPr id="8" name="">
             <a:extLst xmlns:a="http://schemas.openxmlformats.org/drawingml/2006/main">
               <a:ext uri="{FF2B5EF4-FFF2-40B4-BE49-F238E27FC236}">
-                <a16:creationId xmlns:a16="http://schemas.microsoft.com/office/drawing/2014/main" id="{CC4AB7BC-1747-46F8-91BA-0E42BE986ED9}"/>
+                <a16:creationId xmlns:a16="http://schemas.microsoft.com/office/drawing/2014/main" id="{F77C808B-3CA8-4779-91BC-146BBE6D323E}"/>
               </a:ext>
             </a:extLst>
           </p:cNvPr>
@@ -12218,7 +12226,7 @@
           <p:cNvPr id="9" name="">
             <a:extLst xmlns:a="http://schemas.openxmlformats.org/drawingml/2006/main">
               <a:ext uri="{FF2B5EF4-FFF2-40B4-BE49-F238E27FC236}">
-                <a16:creationId xmlns:a16="http://schemas.microsoft.com/office/drawing/2014/main" id="{E3529B37-08CF-46A4-B07A-1EF3BBCB867B}"/>
+                <a16:creationId xmlns:a16="http://schemas.microsoft.com/office/drawing/2014/main" id="{1CD57720-DCC5-43E7-A0B7-E6B3541F0EBD}"/>
               </a:ext>
             </a:extLst>
           </p:cNvPr>
@@ -12275,7 +12283,7 @@
           <p:cNvPr id="10" name="">
             <a:extLst xmlns:a="http://schemas.openxmlformats.org/drawingml/2006/main">
               <a:ext uri="{FF2B5EF4-FFF2-40B4-BE49-F238E27FC236}">
-                <a16:creationId xmlns:a16="http://schemas.microsoft.com/office/drawing/2014/main" id="{F8732A2F-6C9F-4772-B311-93ED52C51E3F}"/>
+                <a16:creationId xmlns:a16="http://schemas.microsoft.com/office/drawing/2014/main" id="{F475B327-E68D-494E-AF7D-DFDDBBB0D685}"/>
               </a:ext>
             </a:extLst>
           </p:cNvPr>
@@ -12309,7 +12317,7 @@
           <p:cNvPr id="11" name="">
             <a:extLst xmlns:a="http://schemas.openxmlformats.org/drawingml/2006/main">
               <a:ext uri="{FF2B5EF4-FFF2-40B4-BE49-F238E27FC236}">
-                <a16:creationId xmlns:a16="http://schemas.microsoft.com/office/drawing/2014/main" id="{90CBA7A7-B5AB-4369-8BC6-D2EC2109480D}"/>
+                <a16:creationId xmlns:a16="http://schemas.microsoft.com/office/drawing/2014/main" id="{C98CD4FA-A74E-4D27-8012-A4DFFF3D309E}"/>
               </a:ext>
             </a:extLst>
           </p:cNvPr>
@@ -12341,7 +12349,7 @@
           <p:cNvPr id="12" name="">
             <a:extLst xmlns:a="http://schemas.openxmlformats.org/drawingml/2006/main">
               <a:ext uri="{FF2B5EF4-FFF2-40B4-BE49-F238E27FC236}">
-                <a16:creationId xmlns:a16="http://schemas.microsoft.com/office/drawing/2014/main" id="{76FEAD96-B28F-4B63-AA47-94C82CB0CFA1}"/>
+                <a16:creationId xmlns:a16="http://schemas.microsoft.com/office/drawing/2014/main" id="{B6C9CD60-0381-4275-8273-66579A84163D}"/>
               </a:ext>
             </a:extLst>
           </p:cNvPr>
@@ -12398,7 +12406,7 @@
           <p:cNvPr id="13" name="">
             <a:extLst xmlns:a="http://schemas.openxmlformats.org/drawingml/2006/main">
               <a:ext uri="{FF2B5EF4-FFF2-40B4-BE49-F238E27FC236}">
-                <a16:creationId xmlns:a16="http://schemas.microsoft.com/office/drawing/2014/main" id="{78BCB2FF-78FC-46AF-92FB-61319EC99F88}"/>
+                <a16:creationId xmlns:a16="http://schemas.microsoft.com/office/drawing/2014/main" id="{98B0AB39-90DA-408A-8BEB-DA2A0E0F90FF}"/>
               </a:ext>
             </a:extLst>
           </p:cNvPr>
@@ -12455,7 +12463,7 @@
           <p:cNvPr id="14" name="">
             <a:extLst xmlns:a="http://schemas.openxmlformats.org/drawingml/2006/main">
               <a:ext uri="{FF2B5EF4-FFF2-40B4-BE49-F238E27FC236}">
-                <a16:creationId xmlns:a16="http://schemas.microsoft.com/office/drawing/2014/main" id="{BC877C2C-6505-40BE-ABD7-337B575FA7D3}"/>
+                <a16:creationId xmlns:a16="http://schemas.microsoft.com/office/drawing/2014/main" id="{C4648016-102C-44E7-B450-99D20DA60221}"/>
               </a:ext>
             </a:extLst>
           </p:cNvPr>
@@ -12489,7 +12497,7 @@
           <p:cNvPr id="15" name="">
             <a:extLst xmlns:a="http://schemas.openxmlformats.org/drawingml/2006/main">
               <a:ext uri="{FF2B5EF4-FFF2-40B4-BE49-F238E27FC236}">
-                <a16:creationId xmlns:a16="http://schemas.microsoft.com/office/drawing/2014/main" id="{92FC902E-437A-441C-80F0-D31FE307B4FA}"/>
+                <a16:creationId xmlns:a16="http://schemas.microsoft.com/office/drawing/2014/main" id="{CBC29E21-D39F-4BF4-BA5F-1B47812FC550}"/>
               </a:ext>
             </a:extLst>
           </p:cNvPr>
@@ -12521,7 +12529,7 @@
           <p:cNvPr id="16" name="">
             <a:extLst xmlns:a="http://schemas.openxmlformats.org/drawingml/2006/main">
               <a:ext uri="{FF2B5EF4-FFF2-40B4-BE49-F238E27FC236}">
-                <a16:creationId xmlns:a16="http://schemas.microsoft.com/office/drawing/2014/main" id="{D4E65418-2566-4CA4-BC38-1D505FAF2CD5}"/>
+                <a16:creationId xmlns:a16="http://schemas.microsoft.com/office/drawing/2014/main" id="{571B3C53-E342-4140-958B-DB5E06E6D220}"/>
               </a:ext>
             </a:extLst>
           </p:cNvPr>
@@ -12578,7 +12586,7 @@
           <p:cNvPr id="17" name="">
             <a:extLst xmlns:a="http://schemas.openxmlformats.org/drawingml/2006/main">
               <a:ext uri="{FF2B5EF4-FFF2-40B4-BE49-F238E27FC236}">
-                <a16:creationId xmlns:a16="http://schemas.microsoft.com/office/drawing/2014/main" id="{83C51EC4-F96D-4AB3-99C2-51A509C454C2}"/>
+                <a16:creationId xmlns:a16="http://schemas.microsoft.com/office/drawing/2014/main" id="{FFAB5E9F-9F22-4321-AA06-4961E46009A8}"/>
               </a:ext>
             </a:extLst>
           </p:cNvPr>
@@ -12635,7 +12643,7 @@
           <p:cNvPr id="18" name="">
             <a:extLst xmlns:a="http://schemas.openxmlformats.org/drawingml/2006/main">
               <a:ext uri="{FF2B5EF4-FFF2-40B4-BE49-F238E27FC236}">
-                <a16:creationId xmlns:a16="http://schemas.microsoft.com/office/drawing/2014/main" id="{E9C53153-CF00-407C-8F2E-06FBF7F8B192}"/>
+                <a16:creationId xmlns:a16="http://schemas.microsoft.com/office/drawing/2014/main" id="{5854EB70-35D9-43D9-8A30-555E666736DE}"/>
               </a:ext>
             </a:extLst>
           </p:cNvPr>
@@ -12669,7 +12677,7 @@
           <p:cNvPr id="19" name="">
             <a:extLst xmlns:a="http://schemas.openxmlformats.org/drawingml/2006/main">
               <a:ext uri="{FF2B5EF4-FFF2-40B4-BE49-F238E27FC236}">
-                <a16:creationId xmlns:a16="http://schemas.microsoft.com/office/drawing/2014/main" id="{2CD46D39-7582-4E98-AB2C-FC5D04463E34}"/>
+                <a16:creationId xmlns:a16="http://schemas.microsoft.com/office/drawing/2014/main" id="{6B01226D-AB2E-499B-B657-B90FBEB20065}"/>
               </a:ext>
             </a:extLst>
           </p:cNvPr>
@@ -12701,7 +12709,7 @@
           <p:cNvPr id="20" name="">
             <a:extLst xmlns:a="http://schemas.openxmlformats.org/drawingml/2006/main">
               <a:ext uri="{FF2B5EF4-FFF2-40B4-BE49-F238E27FC236}">
-                <a16:creationId xmlns:a16="http://schemas.microsoft.com/office/drawing/2014/main" id="{1984121C-2DC4-4068-8704-CFBEABEC9634}"/>
+                <a16:creationId xmlns:a16="http://schemas.microsoft.com/office/drawing/2014/main" id="{030FF6BB-538E-446A-B268-04F3E17EC063}"/>
               </a:ext>
             </a:extLst>
           </p:cNvPr>
@@ -12758,7 +12766,7 @@
           <p:cNvPr id="21" name="">
             <a:extLst xmlns:a="http://schemas.openxmlformats.org/drawingml/2006/main">
               <a:ext uri="{FF2B5EF4-FFF2-40B4-BE49-F238E27FC236}">
-                <a16:creationId xmlns:a16="http://schemas.microsoft.com/office/drawing/2014/main" id="{F6B2F01B-3442-4C2D-B6F1-A664910D4B7A}"/>
+                <a16:creationId xmlns:a16="http://schemas.microsoft.com/office/drawing/2014/main" id="{43629034-5624-4986-BF84-EC3CDD767FCD}"/>
               </a:ext>
             </a:extLst>
           </p:cNvPr>
@@ -12815,7 +12823,7 @@
           <p:cNvPr id="22" name="">
             <a:extLst xmlns:a="http://schemas.openxmlformats.org/drawingml/2006/main">
               <a:ext uri="{FF2B5EF4-FFF2-40B4-BE49-F238E27FC236}">
-                <a16:creationId xmlns:a16="http://schemas.microsoft.com/office/drawing/2014/main" id="{2D5149FF-45B1-4AF8-9637-C5ED3B2EE5E8}"/>
+                <a16:creationId xmlns:a16="http://schemas.microsoft.com/office/drawing/2014/main" id="{BFF554AC-87F5-4B98-ACB5-62FF04C59E65}"/>
               </a:ext>
             </a:extLst>
           </p:cNvPr>
@@ -12870,7 +12878,7 @@
     </p:spTree>
     <p:extLst>
       <p:ext uri="{BB962C8B-B14F-4D97-AF65-F5344CB8AC3E}">
-        <p14:creationId xmlns:p14="http://schemas.microsoft.com/office/powerpoint/2010/main" val="270257789"/>
+        <p14:creationId xmlns:p14="http://schemas.microsoft.com/office/powerpoint/2010/main" val="1892895900"/>
       </p:ext>
     </p:extLst>
   </p:cSld>
@@ -13071,7 +13079,7 @@
           <p:cNvPr id="22" name="">
             <a:extLst xmlns:a="http://schemas.openxmlformats.org/drawingml/2006/main">
               <a:ext uri="{FF2B5EF4-FFF2-40B4-BE49-F238E27FC236}">
-                <a16:creationId xmlns:a16="http://schemas.microsoft.com/office/drawing/2014/main" id="{C064BC2D-C66A-4868-9786-3C7722A64193}"/>
+                <a16:creationId xmlns:a16="http://schemas.microsoft.com/office/drawing/2014/main" id="{9E2F781C-B288-4DBB-B145-65AC68755B88}"/>
               </a:ext>
             </a:extLst>
           </p:cNvPr>
@@ -13103,7 +13111,7 @@
           <p:cNvPr id="2" name="">
             <a:extLst xmlns:a="http://schemas.openxmlformats.org/drawingml/2006/main">
               <a:ext uri="{FF2B5EF4-FFF2-40B4-BE49-F238E27FC236}">
-                <a16:creationId xmlns:a16="http://schemas.microsoft.com/office/drawing/2014/main" id="{086E5F6F-AE43-4F63-B0B7-C256B432C7B0}"/>
+                <a16:creationId xmlns:a16="http://schemas.microsoft.com/office/drawing/2014/main" id="{8F36A1C5-E6D8-437D-BF3B-358773F19ADF}"/>
               </a:ext>
             </a:extLst>
           </p:cNvPr>
@@ -13160,7 +13168,7 @@
           <p:cNvPr id="3" name="">
             <a:extLst xmlns:a="http://schemas.openxmlformats.org/drawingml/2006/main">
               <a:ext uri="{FF2B5EF4-FFF2-40B4-BE49-F238E27FC236}">
-                <a16:creationId xmlns:a16="http://schemas.microsoft.com/office/drawing/2014/main" id="{B8A15EA3-42A3-4C50-834E-DA1DA5FE7A76}"/>
+                <a16:creationId xmlns:a16="http://schemas.microsoft.com/office/drawing/2014/main" id="{35BFAC08-9F61-44C0-8425-A783998AC562}"/>
               </a:ext>
             </a:extLst>
           </p:cNvPr>
@@ -13192,7 +13200,7 @@
           <p:cNvPr id="4" name="">
             <a:extLst xmlns:a="http://schemas.openxmlformats.org/drawingml/2006/main">
               <a:ext uri="{FF2B5EF4-FFF2-40B4-BE49-F238E27FC236}">
-                <a16:creationId xmlns:a16="http://schemas.microsoft.com/office/drawing/2014/main" id="{2D80D90E-63BA-4074-9298-21A02616AD7F}"/>
+                <a16:creationId xmlns:a16="http://schemas.microsoft.com/office/drawing/2014/main" id="{0AF86053-5F78-4AA2-8C8A-FF65FB5B76D6}"/>
               </a:ext>
             </a:extLst>
           </p:cNvPr>
@@ -13249,7 +13257,7 @@
           <p:cNvPr id="5" name="">
             <a:extLst xmlns:a="http://schemas.openxmlformats.org/drawingml/2006/main">
               <a:ext uri="{FF2B5EF4-FFF2-40B4-BE49-F238E27FC236}">
-                <a16:creationId xmlns:a16="http://schemas.microsoft.com/office/drawing/2014/main" id="{9FF47854-1527-4489-A889-5EA4DB470138}"/>
+                <a16:creationId xmlns:a16="http://schemas.microsoft.com/office/drawing/2014/main" id="{8F481299-42C7-4585-BDD5-A9D2BB7DD23E}"/>
               </a:ext>
             </a:extLst>
           </p:cNvPr>
@@ -13306,7 +13314,7 @@
           <p:cNvPr id="6" name="">
             <a:extLst xmlns:a="http://schemas.openxmlformats.org/drawingml/2006/main">
               <a:ext uri="{FF2B5EF4-FFF2-40B4-BE49-F238E27FC236}">
-                <a16:creationId xmlns:a16="http://schemas.microsoft.com/office/drawing/2014/main" id="{6D481CB2-0664-4CE8-AF02-B88A977596C8}"/>
+                <a16:creationId xmlns:a16="http://schemas.microsoft.com/office/drawing/2014/main" id="{FE49B3A7-C30A-46D2-83F0-18103AE4B140}"/>
               </a:ext>
             </a:extLst>
           </p:cNvPr>
@@ -13363,7 +13371,7 @@
           <p:cNvPr id="7" name="">
             <a:extLst xmlns:a="http://schemas.openxmlformats.org/drawingml/2006/main">
               <a:ext uri="{FF2B5EF4-FFF2-40B4-BE49-F238E27FC236}">
-                <a16:creationId xmlns:a16="http://schemas.microsoft.com/office/drawing/2014/main" id="{A8C4917A-37A2-4894-9C73-A987D75C3EDD}"/>
+                <a16:creationId xmlns:a16="http://schemas.microsoft.com/office/drawing/2014/main" id="{235BD0C5-0B28-42AA-A7AE-5F6A11203360}"/>
               </a:ext>
             </a:extLst>
           </p:cNvPr>
@@ -13395,7 +13403,7 @@
           <p:cNvPr id="8" name="">
             <a:extLst xmlns:a="http://schemas.openxmlformats.org/drawingml/2006/main">
               <a:ext uri="{FF2B5EF4-FFF2-40B4-BE49-F238E27FC236}">
-                <a16:creationId xmlns:a16="http://schemas.microsoft.com/office/drawing/2014/main" id="{CBE164E6-D2F1-4529-8404-C92A3FC4EE9D}"/>
+                <a16:creationId xmlns:a16="http://schemas.microsoft.com/office/drawing/2014/main" id="{3ABE615F-D62D-4689-8EAA-A9848DA0F1A4}"/>
               </a:ext>
             </a:extLst>
           </p:cNvPr>
@@ -13452,7 +13460,7 @@
           <p:cNvPr id="9" name="">
             <a:extLst xmlns:a="http://schemas.openxmlformats.org/drawingml/2006/main">
               <a:ext uri="{FF2B5EF4-FFF2-40B4-BE49-F238E27FC236}">
-                <a16:creationId xmlns:a16="http://schemas.microsoft.com/office/drawing/2014/main" id="{0B39BEEB-D404-4F4B-8EBB-58300B998F68}"/>
+                <a16:creationId xmlns:a16="http://schemas.microsoft.com/office/drawing/2014/main" id="{D6CA1206-0C9B-48D5-8F9D-76C4226011A9}"/>
               </a:ext>
             </a:extLst>
           </p:cNvPr>
@@ -13509,7 +13517,7 @@
           <p:cNvPr id="10" name="">
             <a:extLst xmlns:a="http://schemas.openxmlformats.org/drawingml/2006/main">
               <a:ext uri="{FF2B5EF4-FFF2-40B4-BE49-F238E27FC236}">
-                <a16:creationId xmlns:a16="http://schemas.microsoft.com/office/drawing/2014/main" id="{F48B1202-E7F0-4F80-A856-767EC61F3AEC}"/>
+                <a16:creationId xmlns:a16="http://schemas.microsoft.com/office/drawing/2014/main" id="{76C96BD1-39D4-426F-8417-6902BD028EFB}"/>
               </a:ext>
             </a:extLst>
           </p:cNvPr>
@@ -13543,7 +13551,7 @@
           <p:cNvPr id="11" name="">
             <a:extLst xmlns:a="http://schemas.openxmlformats.org/drawingml/2006/main">
               <a:ext uri="{FF2B5EF4-FFF2-40B4-BE49-F238E27FC236}">
-                <a16:creationId xmlns:a16="http://schemas.microsoft.com/office/drawing/2014/main" id="{1BC76AAC-B00C-4A32-94CE-9A0318259C99}"/>
+                <a16:creationId xmlns:a16="http://schemas.microsoft.com/office/drawing/2014/main" id="{4B794BE7-3347-46EC-A1E4-19743B8747DC}"/>
               </a:ext>
             </a:extLst>
           </p:cNvPr>
@@ -13575,7 +13583,7 @@
           <p:cNvPr id="12" name="">
             <a:extLst xmlns:a="http://schemas.openxmlformats.org/drawingml/2006/main">
               <a:ext uri="{FF2B5EF4-FFF2-40B4-BE49-F238E27FC236}">
-                <a16:creationId xmlns:a16="http://schemas.microsoft.com/office/drawing/2014/main" id="{8EE2CEF6-E8F0-4D89-A58A-A0BE13C93961}"/>
+                <a16:creationId xmlns:a16="http://schemas.microsoft.com/office/drawing/2014/main" id="{CD44F2AD-3B08-40FF-9CDD-B1C0716205A1}"/>
               </a:ext>
             </a:extLst>
           </p:cNvPr>
@@ -13632,7 +13640,7 @@
           <p:cNvPr id="13" name="">
             <a:extLst xmlns:a="http://schemas.openxmlformats.org/drawingml/2006/main">
               <a:ext uri="{FF2B5EF4-FFF2-40B4-BE49-F238E27FC236}">
-                <a16:creationId xmlns:a16="http://schemas.microsoft.com/office/drawing/2014/main" id="{0A3709DA-07B3-44D7-B188-20A2A70383C7}"/>
+                <a16:creationId xmlns:a16="http://schemas.microsoft.com/office/drawing/2014/main" id="{077E8B70-2ED3-4715-BD22-796B87D5B4BB}"/>
               </a:ext>
             </a:extLst>
           </p:cNvPr>
@@ -13689,7 +13697,7 @@
           <p:cNvPr id="14" name="">
             <a:extLst xmlns:a="http://schemas.openxmlformats.org/drawingml/2006/main">
               <a:ext uri="{FF2B5EF4-FFF2-40B4-BE49-F238E27FC236}">
-                <a16:creationId xmlns:a16="http://schemas.microsoft.com/office/drawing/2014/main" id="{98FF4956-CA99-4568-A888-46D92E0E7905}"/>
+                <a16:creationId xmlns:a16="http://schemas.microsoft.com/office/drawing/2014/main" id="{BD5F2FB9-F55F-4836-B990-C0B440BBD2A8}"/>
               </a:ext>
             </a:extLst>
           </p:cNvPr>
@@ -13723,7 +13731,7 @@
           <p:cNvPr id="15" name="">
             <a:extLst xmlns:a="http://schemas.openxmlformats.org/drawingml/2006/main">
               <a:ext uri="{FF2B5EF4-FFF2-40B4-BE49-F238E27FC236}">
-                <a16:creationId xmlns:a16="http://schemas.microsoft.com/office/drawing/2014/main" id="{773B5DBC-BE48-4D44-ACE8-B7B3CF95971C}"/>
+                <a16:creationId xmlns:a16="http://schemas.microsoft.com/office/drawing/2014/main" id="{DF4046FF-F88A-4E23-898E-E7EBF7E1302E}"/>
               </a:ext>
             </a:extLst>
           </p:cNvPr>
@@ -13755,7 +13763,7 @@
           <p:cNvPr id="16" name="">
             <a:extLst xmlns:a="http://schemas.openxmlformats.org/drawingml/2006/main">
               <a:ext uri="{FF2B5EF4-FFF2-40B4-BE49-F238E27FC236}">
-                <a16:creationId xmlns:a16="http://schemas.microsoft.com/office/drawing/2014/main" id="{501C7FB3-DCDE-40FC-9C32-E131194A0802}"/>
+                <a16:creationId xmlns:a16="http://schemas.microsoft.com/office/drawing/2014/main" id="{ABB3CABB-E8CA-4345-8619-CC73A521FDF0}"/>
               </a:ext>
             </a:extLst>
           </p:cNvPr>
@@ -13812,7 +13820,7 @@
           <p:cNvPr id="17" name="">
             <a:extLst xmlns:a="http://schemas.openxmlformats.org/drawingml/2006/main">
               <a:ext uri="{FF2B5EF4-FFF2-40B4-BE49-F238E27FC236}">
-                <a16:creationId xmlns:a16="http://schemas.microsoft.com/office/drawing/2014/main" id="{3B3041E0-9B6C-455B-A9F6-98EC913CECF5}"/>
+                <a16:creationId xmlns:a16="http://schemas.microsoft.com/office/drawing/2014/main" id="{1AEB2DE5-4E30-4A04-853D-7FD58885AC52}"/>
               </a:ext>
             </a:extLst>
           </p:cNvPr>
@@ -13869,7 +13877,7 @@
           <p:cNvPr id="18" name="">
             <a:extLst xmlns:a="http://schemas.openxmlformats.org/drawingml/2006/main">
               <a:ext uri="{FF2B5EF4-FFF2-40B4-BE49-F238E27FC236}">
-                <a16:creationId xmlns:a16="http://schemas.microsoft.com/office/drawing/2014/main" id="{1D810378-15F7-4C81-BA0E-83F3CE436CAF}"/>
+                <a16:creationId xmlns:a16="http://schemas.microsoft.com/office/drawing/2014/main" id="{EA647163-F0A9-4B1C-996C-906BBE0C8FFA}"/>
               </a:ext>
             </a:extLst>
           </p:cNvPr>
@@ -13903,7 +13911,7 @@
           <p:cNvPr id="19" name="">
             <a:extLst xmlns:a="http://schemas.openxmlformats.org/drawingml/2006/main">
               <a:ext uri="{FF2B5EF4-FFF2-40B4-BE49-F238E27FC236}">
-                <a16:creationId xmlns:a16="http://schemas.microsoft.com/office/drawing/2014/main" id="{23D35189-F170-4F98-A303-0D74B7137DD1}"/>
+                <a16:creationId xmlns:a16="http://schemas.microsoft.com/office/drawing/2014/main" id="{99E50844-3E81-4073-8DC4-DF92BB439612}"/>
               </a:ext>
             </a:extLst>
           </p:cNvPr>
@@ -13935,7 +13943,7 @@
           <p:cNvPr id="20" name="">
             <a:extLst xmlns:a="http://schemas.openxmlformats.org/drawingml/2006/main">
               <a:ext uri="{FF2B5EF4-FFF2-40B4-BE49-F238E27FC236}">
-                <a16:creationId xmlns:a16="http://schemas.microsoft.com/office/drawing/2014/main" id="{0F83ED8A-9613-4977-97AD-9683C8FB0078}"/>
+                <a16:creationId xmlns:a16="http://schemas.microsoft.com/office/drawing/2014/main" id="{A8017D51-9512-43D0-A853-0319AAF4115E}"/>
               </a:ext>
             </a:extLst>
           </p:cNvPr>
@@ -13992,7 +14000,7 @@
           <p:cNvPr id="21" name="">
             <a:extLst xmlns:a="http://schemas.openxmlformats.org/drawingml/2006/main">
               <a:ext uri="{FF2B5EF4-FFF2-40B4-BE49-F238E27FC236}">
-                <a16:creationId xmlns:a16="http://schemas.microsoft.com/office/drawing/2014/main" id="{C12887FF-59C7-4A74-99C6-BB0DEA1ED823}"/>
+                <a16:creationId xmlns:a16="http://schemas.microsoft.com/office/drawing/2014/main" id="{4F22312D-6595-4FA2-A9BD-B3C91FF09273}"/>
               </a:ext>
             </a:extLst>
           </p:cNvPr>
@@ -14047,7 +14055,7 @@
     </p:spTree>
     <p:extLst>
       <p:ext uri="{BB962C8B-B14F-4D97-AF65-F5344CB8AC3E}">
-        <p14:creationId xmlns:p14="http://schemas.microsoft.com/office/powerpoint/2010/main" val="1503338967"/>
+        <p14:creationId xmlns:p14="http://schemas.microsoft.com/office/powerpoint/2010/main" val="702214601"/>
       </p:ext>
     </p:extLst>
   </p:cSld>
